--- a/GPON_Network_Mapping_Project_Report.pptx
+++ b/GPON_Network_Mapping_Project_Report.pptx
@@ -5,17 +5,19 @@
     <p:sldMasterId id="2147483648" r:id="rId1"/>
   </p:sldMasterIdLst>
   <p:sldIdLst>
-    <p:sldId id="256" r:id="rId2"/>
-    <p:sldId id="257" r:id="rId3"/>
-    <p:sldId id="258" r:id="rId4"/>
-    <p:sldId id="259" r:id="rId5"/>
-    <p:sldId id="260" r:id="rId6"/>
-    <p:sldId id="261" r:id="rId7"/>
-    <p:sldId id="262" r:id="rId8"/>
-    <p:sldId id="263" r:id="rId9"/>
-    <p:sldId id="265" r:id="rId10"/>
+    <p:sldId id="256" r:id="rId7"/>
+    <p:sldId id="257" r:id="rId8"/>
+    <p:sldId id="258" r:id="rId9"/>
+    <p:sldId id="259" r:id="rId10"/>
+    <p:sldId id="260" r:id="rId11"/>
+    <p:sldId id="261" r:id="rId12"/>
+    <p:sldId id="262" r:id="rId13"/>
+    <p:sldId id="263" r:id="rId14"/>
+    <p:sldId id="264" r:id="rId15"/>
+    <p:sldId id="265" r:id="rId16"/>
+    <p:sldId id="266" r:id="rId17"/>
   </p:sldIdLst>
-  <p:sldSz cx="12192000" cy="6858000"/>
+  <p:sldSz cx="12191695" cy="6858000" type="screen4x3"/>
   <p:notesSz cx="6858000" cy="9144000"/>
   <p:defaultTextStyle>
     <a:defPPr>
@@ -112,22 +114,6 @@
       </a:defRPr>
     </a:lvl9pPr>
   </p:defaultTextStyle>
-  <p:extLst>
-    <p:ext uri="{EFAFB233-063F-42B5-8137-9DF3F51BA10A}">
-      <p15:sldGuideLst xmlns:p15="http://schemas.microsoft.com/office/powerpoint/2012/main">
-        <p15:guide id="1" orient="horz" pos="2160">
-          <p15:clr>
-            <a:srgbClr val="A4A3A4"/>
-          </p15:clr>
-        </p15:guide>
-        <p15:guide id="2" pos="2880">
-          <p15:clr>
-            <a:srgbClr val="A4A3A4"/>
-          </p15:clr>
-        </p15:guide>
-      </p15:sldGuideLst>
-    </p:ext>
-  </p:extLst>
 </p:presentation>
 </file>
 
@@ -169,9 +155,10 @@
           <a:lstStyle/>
           <a:p>
             <a:r>
-              <a:rPr lang="en-US"/>
+              <a:rPr lang="en-US" smtClean="0"/>
               <a:t>Click to edit Master title style</a:t>
             </a:r>
+            <a:endParaRPr lang="en-US"/>
           </a:p>
         </p:txBody>
       </p:sp>
@@ -287,9 +274,10 @@
           </a:lstStyle>
           <a:p>
             <a:r>
-              <a:rPr lang="en-US"/>
+              <a:rPr lang="en-US" smtClean="0"/>
               <a:t>Click to edit Master subtitle style</a:t>
             </a:r>
+            <a:endParaRPr lang="en-US"/>
           </a:p>
         </p:txBody>
       </p:sp>
@@ -310,7 +298,7 @@
           <a:p>
             <a:fld id="{5BCAD085-E8A6-8845-BD4E-CB4CCA059FC4}" type="datetimeFigureOut">
               <a:rPr lang="en-US" smtClean="0"/>
-              <a:t>10/12/2026</a:t>
+              <a:t>1/27/13</a:t>
             </a:fld>
             <a:endParaRPr lang="en-US"/>
           </a:p>
@@ -404,9 +392,10 @@
           <a:lstStyle/>
           <a:p>
             <a:r>
-              <a:rPr lang="en-US"/>
+              <a:rPr lang="en-US" smtClean="0"/>
               <a:t>Click to edit Master title style</a:t>
             </a:r>
+            <a:endParaRPr lang="en-US"/>
           </a:p>
         </p:txBody>
       </p:sp>
@@ -427,37 +416,38 @@
           <a:p>
             <a:pPr lvl="0"/>
             <a:r>
-              <a:rPr lang="en-US"/>
+              <a:rPr lang="en-US" smtClean="0"/>
               <a:t>Click to edit Master text styles</a:t>
             </a:r>
           </a:p>
           <a:p>
             <a:pPr lvl="1"/>
             <a:r>
-              <a:rPr lang="en-US"/>
+              <a:rPr lang="en-US" smtClean="0"/>
               <a:t>Second level</a:t>
             </a:r>
           </a:p>
           <a:p>
             <a:pPr lvl="2"/>
             <a:r>
-              <a:rPr lang="en-US"/>
+              <a:rPr lang="en-US" smtClean="0"/>
               <a:t>Third level</a:t>
             </a:r>
           </a:p>
           <a:p>
             <a:pPr lvl="3"/>
             <a:r>
-              <a:rPr lang="en-US"/>
+              <a:rPr lang="en-US" smtClean="0"/>
               <a:t>Fourth level</a:t>
             </a:r>
           </a:p>
           <a:p>
             <a:pPr lvl="4"/>
             <a:r>
-              <a:rPr lang="en-US"/>
+              <a:rPr lang="en-US" smtClean="0"/>
               <a:t>Fifth level</a:t>
             </a:r>
+            <a:endParaRPr lang="en-US"/>
           </a:p>
         </p:txBody>
       </p:sp>
@@ -478,7 +468,7 @@
           <a:p>
             <a:fld id="{5BCAD085-E8A6-8845-BD4E-CB4CCA059FC4}" type="datetimeFigureOut">
               <a:rPr lang="en-US" smtClean="0"/>
-              <a:t>10/12/2026</a:t>
+              <a:t>1/27/13</a:t>
             </a:fld>
             <a:endParaRPr lang="en-US"/>
           </a:p>
@@ -577,9 +567,10 @@
           <a:lstStyle/>
           <a:p>
             <a:r>
-              <a:rPr lang="en-US"/>
+              <a:rPr lang="en-US" smtClean="0"/>
               <a:t>Click to edit Master title style</a:t>
             </a:r>
+            <a:endParaRPr lang="en-US"/>
           </a:p>
         </p:txBody>
       </p:sp>
@@ -605,37 +596,38 @@
           <a:p>
             <a:pPr lvl="0"/>
             <a:r>
-              <a:rPr lang="en-US"/>
+              <a:rPr lang="en-US" smtClean="0"/>
               <a:t>Click to edit Master text styles</a:t>
             </a:r>
           </a:p>
           <a:p>
             <a:pPr lvl="1"/>
             <a:r>
-              <a:rPr lang="en-US"/>
+              <a:rPr lang="en-US" smtClean="0"/>
               <a:t>Second level</a:t>
             </a:r>
           </a:p>
           <a:p>
             <a:pPr lvl="2"/>
             <a:r>
-              <a:rPr lang="en-US"/>
+              <a:rPr lang="en-US" smtClean="0"/>
               <a:t>Third level</a:t>
             </a:r>
           </a:p>
           <a:p>
             <a:pPr lvl="3"/>
             <a:r>
-              <a:rPr lang="en-US"/>
+              <a:rPr lang="en-US" smtClean="0"/>
               <a:t>Fourth level</a:t>
             </a:r>
           </a:p>
           <a:p>
             <a:pPr lvl="4"/>
             <a:r>
-              <a:rPr lang="en-US"/>
+              <a:rPr lang="en-US" smtClean="0"/>
               <a:t>Fifth level</a:t>
             </a:r>
+            <a:endParaRPr lang="en-US"/>
           </a:p>
         </p:txBody>
       </p:sp>
@@ -656,7 +648,7 @@
           <a:p>
             <a:fld id="{5BCAD085-E8A6-8845-BD4E-CB4CCA059FC4}" type="datetimeFigureOut">
               <a:rPr lang="en-US" smtClean="0"/>
-              <a:t>10/12/2026</a:t>
+              <a:t>1/27/13</a:t>
             </a:fld>
             <a:endParaRPr lang="en-US"/>
           </a:p>
@@ -750,9 +742,10 @@
           <a:lstStyle/>
           <a:p>
             <a:r>
-              <a:rPr lang="en-US"/>
+              <a:rPr lang="en-US" smtClean="0"/>
               <a:t>Click to edit Master title style</a:t>
             </a:r>
+            <a:endParaRPr lang="en-US"/>
           </a:p>
         </p:txBody>
       </p:sp>
@@ -773,37 +766,38 @@
           <a:p>
             <a:pPr lvl="0"/>
             <a:r>
-              <a:rPr lang="en-US"/>
+              <a:rPr lang="en-US" smtClean="0"/>
               <a:t>Click to edit Master text styles</a:t>
             </a:r>
           </a:p>
           <a:p>
             <a:pPr lvl="1"/>
             <a:r>
-              <a:rPr lang="en-US"/>
+              <a:rPr lang="en-US" smtClean="0"/>
               <a:t>Second level</a:t>
             </a:r>
           </a:p>
           <a:p>
             <a:pPr lvl="2"/>
             <a:r>
-              <a:rPr lang="en-US"/>
+              <a:rPr lang="en-US" smtClean="0"/>
               <a:t>Third level</a:t>
             </a:r>
           </a:p>
           <a:p>
             <a:pPr lvl="3"/>
             <a:r>
-              <a:rPr lang="en-US"/>
+              <a:rPr lang="en-US" smtClean="0"/>
               <a:t>Fourth level</a:t>
             </a:r>
           </a:p>
           <a:p>
             <a:pPr lvl="4"/>
             <a:r>
-              <a:rPr lang="en-US"/>
+              <a:rPr lang="en-US" smtClean="0"/>
               <a:t>Fifth level</a:t>
             </a:r>
+            <a:endParaRPr lang="en-US"/>
           </a:p>
         </p:txBody>
       </p:sp>
@@ -824,7 +818,7 @@
           <a:p>
             <a:fld id="{5BCAD085-E8A6-8845-BD4E-CB4CCA059FC4}" type="datetimeFigureOut">
               <a:rPr lang="en-US" smtClean="0"/>
-              <a:t>10/12/2026</a:t>
+              <a:t>1/27/13</a:t>
             </a:fld>
             <a:endParaRPr lang="en-US"/>
           </a:p>
@@ -927,9 +921,10 @@
           </a:lstStyle>
           <a:p>
             <a:r>
-              <a:rPr lang="en-US"/>
+              <a:rPr lang="en-US" smtClean="0"/>
               <a:t>Click to edit Master title style</a:t>
             </a:r>
+            <a:endParaRPr lang="en-US"/>
           </a:p>
         </p:txBody>
       </p:sp>
@@ -1046,7 +1041,7 @@
           <a:p>
             <a:pPr lvl="0"/>
             <a:r>
-              <a:rPr lang="en-US"/>
+              <a:rPr lang="en-US" smtClean="0"/>
               <a:t>Click to edit Master text styles</a:t>
             </a:r>
           </a:p>
@@ -1069,7 +1064,7 @@
           <a:p>
             <a:fld id="{5BCAD085-E8A6-8845-BD4E-CB4CCA059FC4}" type="datetimeFigureOut">
               <a:rPr lang="en-US" smtClean="0"/>
-              <a:t>10/12/2026</a:t>
+              <a:t>1/27/13</a:t>
             </a:fld>
             <a:endParaRPr lang="en-US"/>
           </a:p>
@@ -1163,9 +1158,10 @@
           <a:lstStyle/>
           <a:p>
             <a:r>
-              <a:rPr lang="en-US"/>
+              <a:rPr lang="en-US" smtClean="0"/>
               <a:t>Click to edit Master title style</a:t>
             </a:r>
+            <a:endParaRPr lang="en-US"/>
           </a:p>
         </p:txBody>
       </p:sp>
@@ -1219,37 +1215,38 @@
           <a:p>
             <a:pPr lvl="0"/>
             <a:r>
-              <a:rPr lang="en-US"/>
+              <a:rPr lang="en-US" smtClean="0"/>
               <a:t>Click to edit Master text styles</a:t>
             </a:r>
           </a:p>
           <a:p>
             <a:pPr lvl="1"/>
             <a:r>
-              <a:rPr lang="en-US"/>
+              <a:rPr lang="en-US" smtClean="0"/>
               <a:t>Second level</a:t>
             </a:r>
           </a:p>
           <a:p>
             <a:pPr lvl="2"/>
             <a:r>
-              <a:rPr lang="en-US"/>
+              <a:rPr lang="en-US" smtClean="0"/>
               <a:t>Third level</a:t>
             </a:r>
           </a:p>
           <a:p>
             <a:pPr lvl="3"/>
             <a:r>
-              <a:rPr lang="en-US"/>
+              <a:rPr lang="en-US" smtClean="0"/>
               <a:t>Fourth level</a:t>
             </a:r>
           </a:p>
           <a:p>
             <a:pPr lvl="4"/>
             <a:r>
-              <a:rPr lang="en-US"/>
+              <a:rPr lang="en-US" smtClean="0"/>
               <a:t>Fifth level</a:t>
             </a:r>
+            <a:endParaRPr lang="en-US"/>
           </a:p>
         </p:txBody>
       </p:sp>
@@ -1303,37 +1300,38 @@
           <a:p>
             <a:pPr lvl="0"/>
             <a:r>
-              <a:rPr lang="en-US"/>
+              <a:rPr lang="en-US" smtClean="0"/>
               <a:t>Click to edit Master text styles</a:t>
             </a:r>
           </a:p>
           <a:p>
             <a:pPr lvl="1"/>
             <a:r>
-              <a:rPr lang="en-US"/>
+              <a:rPr lang="en-US" smtClean="0"/>
               <a:t>Second level</a:t>
             </a:r>
           </a:p>
           <a:p>
             <a:pPr lvl="2"/>
             <a:r>
-              <a:rPr lang="en-US"/>
+              <a:rPr lang="en-US" smtClean="0"/>
               <a:t>Third level</a:t>
             </a:r>
           </a:p>
           <a:p>
             <a:pPr lvl="3"/>
             <a:r>
-              <a:rPr lang="en-US"/>
+              <a:rPr lang="en-US" smtClean="0"/>
               <a:t>Fourth level</a:t>
             </a:r>
           </a:p>
           <a:p>
             <a:pPr lvl="4"/>
             <a:r>
-              <a:rPr lang="en-US"/>
+              <a:rPr lang="en-US" smtClean="0"/>
               <a:t>Fifth level</a:t>
             </a:r>
+            <a:endParaRPr lang="en-US"/>
           </a:p>
         </p:txBody>
       </p:sp>
@@ -1354,7 +1352,7 @@
           <a:p>
             <a:fld id="{5BCAD085-E8A6-8845-BD4E-CB4CCA059FC4}" type="datetimeFigureOut">
               <a:rPr lang="en-US" smtClean="0"/>
-              <a:t>10/12/2026</a:t>
+              <a:t>1/27/13</a:t>
             </a:fld>
             <a:endParaRPr lang="en-US"/>
           </a:p>
@@ -1452,9 +1450,10 @@
           </a:lstStyle>
           <a:p>
             <a:r>
-              <a:rPr lang="en-US"/>
+              <a:rPr lang="en-US" smtClean="0"/>
               <a:t>Click to edit Master title style</a:t>
             </a:r>
+            <a:endParaRPr lang="en-US"/>
           </a:p>
         </p:txBody>
       </p:sp>
@@ -1517,7 +1516,7 @@
           <a:p>
             <a:pPr lvl="0"/>
             <a:r>
-              <a:rPr lang="en-US"/>
+              <a:rPr lang="en-US" smtClean="0"/>
               <a:t>Click to edit Master text styles</a:t>
             </a:r>
           </a:p>
@@ -1573,37 +1572,38 @@
           <a:p>
             <a:pPr lvl="0"/>
             <a:r>
-              <a:rPr lang="en-US"/>
+              <a:rPr lang="en-US" smtClean="0"/>
               <a:t>Click to edit Master text styles</a:t>
             </a:r>
           </a:p>
           <a:p>
             <a:pPr lvl="1"/>
             <a:r>
-              <a:rPr lang="en-US"/>
+              <a:rPr lang="en-US" smtClean="0"/>
               <a:t>Second level</a:t>
             </a:r>
           </a:p>
           <a:p>
             <a:pPr lvl="2"/>
             <a:r>
-              <a:rPr lang="en-US"/>
+              <a:rPr lang="en-US" smtClean="0"/>
               <a:t>Third level</a:t>
             </a:r>
           </a:p>
           <a:p>
             <a:pPr lvl="3"/>
             <a:r>
-              <a:rPr lang="en-US"/>
+              <a:rPr lang="en-US" smtClean="0"/>
               <a:t>Fourth level</a:t>
             </a:r>
           </a:p>
           <a:p>
             <a:pPr lvl="4"/>
             <a:r>
-              <a:rPr lang="en-US"/>
+              <a:rPr lang="en-US" smtClean="0"/>
               <a:t>Fifth level</a:t>
             </a:r>
+            <a:endParaRPr lang="en-US"/>
           </a:p>
         </p:txBody>
       </p:sp>
@@ -1666,7 +1666,7 @@
           <a:p>
             <a:pPr lvl="0"/>
             <a:r>
-              <a:rPr lang="en-US"/>
+              <a:rPr lang="en-US" smtClean="0"/>
               <a:t>Click to edit Master text styles</a:t>
             </a:r>
           </a:p>
@@ -1722,37 +1722,38 @@
           <a:p>
             <a:pPr lvl="0"/>
             <a:r>
-              <a:rPr lang="en-US"/>
+              <a:rPr lang="en-US" smtClean="0"/>
               <a:t>Click to edit Master text styles</a:t>
             </a:r>
           </a:p>
           <a:p>
             <a:pPr lvl="1"/>
             <a:r>
-              <a:rPr lang="en-US"/>
+              <a:rPr lang="en-US" smtClean="0"/>
               <a:t>Second level</a:t>
             </a:r>
           </a:p>
           <a:p>
             <a:pPr lvl="2"/>
             <a:r>
-              <a:rPr lang="en-US"/>
+              <a:rPr lang="en-US" smtClean="0"/>
               <a:t>Third level</a:t>
             </a:r>
           </a:p>
           <a:p>
             <a:pPr lvl="3"/>
             <a:r>
-              <a:rPr lang="en-US"/>
+              <a:rPr lang="en-US" smtClean="0"/>
               <a:t>Fourth level</a:t>
             </a:r>
           </a:p>
           <a:p>
             <a:pPr lvl="4"/>
             <a:r>
-              <a:rPr lang="en-US"/>
+              <a:rPr lang="en-US" smtClean="0"/>
               <a:t>Fifth level</a:t>
             </a:r>
+            <a:endParaRPr lang="en-US"/>
           </a:p>
         </p:txBody>
       </p:sp>
@@ -1773,7 +1774,7 @@
           <a:p>
             <a:fld id="{5BCAD085-E8A6-8845-BD4E-CB4CCA059FC4}" type="datetimeFigureOut">
               <a:rPr lang="en-US" smtClean="0"/>
-              <a:t>10/12/2026</a:t>
+              <a:t>1/27/13</a:t>
             </a:fld>
             <a:endParaRPr lang="en-US"/>
           </a:p>
@@ -1867,9 +1868,10 @@
           <a:lstStyle/>
           <a:p>
             <a:r>
-              <a:rPr lang="en-US"/>
+              <a:rPr lang="en-US" smtClean="0"/>
               <a:t>Click to edit Master title style</a:t>
             </a:r>
+            <a:endParaRPr lang="en-US"/>
           </a:p>
         </p:txBody>
       </p:sp>
@@ -1890,7 +1892,7 @@
           <a:p>
             <a:fld id="{5BCAD085-E8A6-8845-BD4E-CB4CCA059FC4}" type="datetimeFigureOut">
               <a:rPr lang="en-US" smtClean="0"/>
-              <a:t>10/12/2026</a:t>
+              <a:t>1/27/13</a:t>
             </a:fld>
             <a:endParaRPr lang="en-US"/>
           </a:p>
@@ -1985,7 +1987,7 @@
           <a:p>
             <a:fld id="{5BCAD085-E8A6-8845-BD4E-CB4CCA059FC4}" type="datetimeFigureOut">
               <a:rPr lang="en-US" smtClean="0"/>
-              <a:t>10/12/2026</a:t>
+              <a:t>1/27/13</a:t>
             </a:fld>
             <a:endParaRPr lang="en-US"/>
           </a:p>
@@ -2088,9 +2090,10 @@
           </a:lstStyle>
           <a:p>
             <a:r>
-              <a:rPr lang="en-US"/>
+              <a:rPr lang="en-US" smtClean="0"/>
               <a:t>Click to edit Master title style</a:t>
             </a:r>
+            <a:endParaRPr lang="en-US"/>
           </a:p>
         </p:txBody>
       </p:sp>
@@ -2144,37 +2147,38 @@
           <a:p>
             <a:pPr lvl="0"/>
             <a:r>
-              <a:rPr lang="en-US"/>
+              <a:rPr lang="en-US" smtClean="0"/>
               <a:t>Click to edit Master text styles</a:t>
             </a:r>
           </a:p>
           <a:p>
             <a:pPr lvl="1"/>
             <a:r>
-              <a:rPr lang="en-US"/>
+              <a:rPr lang="en-US" smtClean="0"/>
               <a:t>Second level</a:t>
             </a:r>
           </a:p>
           <a:p>
             <a:pPr lvl="2"/>
             <a:r>
-              <a:rPr lang="en-US"/>
+              <a:rPr lang="en-US" smtClean="0"/>
               <a:t>Third level</a:t>
             </a:r>
           </a:p>
           <a:p>
             <a:pPr lvl="3"/>
             <a:r>
-              <a:rPr lang="en-US"/>
+              <a:rPr lang="en-US" smtClean="0"/>
               <a:t>Fourth level</a:t>
             </a:r>
           </a:p>
           <a:p>
             <a:pPr lvl="4"/>
             <a:r>
-              <a:rPr lang="en-US"/>
+              <a:rPr lang="en-US" smtClean="0"/>
               <a:t>Fifth level</a:t>
             </a:r>
+            <a:endParaRPr lang="en-US"/>
           </a:p>
         </p:txBody>
       </p:sp>
@@ -2237,7 +2241,7 @@
           <a:p>
             <a:pPr lvl="0"/>
             <a:r>
-              <a:rPr lang="en-US"/>
+              <a:rPr lang="en-US" smtClean="0"/>
               <a:t>Click to edit Master text styles</a:t>
             </a:r>
           </a:p>
@@ -2260,7 +2264,7 @@
           <a:p>
             <a:fld id="{5BCAD085-E8A6-8845-BD4E-CB4CCA059FC4}" type="datetimeFigureOut">
               <a:rPr lang="en-US" smtClean="0"/>
-              <a:t>10/12/2026</a:t>
+              <a:t>1/27/13</a:t>
             </a:fld>
             <a:endParaRPr lang="en-US"/>
           </a:p>
@@ -2363,9 +2367,10 @@
           </a:lstStyle>
           <a:p>
             <a:r>
-              <a:rPr lang="en-US"/>
+              <a:rPr lang="en-US" smtClean="0"/>
               <a:t>Click to edit Master title style</a:t>
             </a:r>
+            <a:endParaRPr lang="en-US"/>
           </a:p>
         </p:txBody>
       </p:sp>
@@ -2489,7 +2494,7 @@
           <a:p>
             <a:pPr lvl="0"/>
             <a:r>
-              <a:rPr lang="en-US"/>
+              <a:rPr lang="en-US" smtClean="0"/>
               <a:t>Click to edit Master text styles</a:t>
             </a:r>
           </a:p>
@@ -2512,7 +2517,7 @@
           <a:p>
             <a:fld id="{5BCAD085-E8A6-8845-BD4E-CB4CCA059FC4}" type="datetimeFigureOut">
               <a:rPr lang="en-US" smtClean="0"/>
-              <a:t>10/12/2026</a:t>
+              <a:t>1/27/13</a:t>
             </a:fld>
             <a:endParaRPr lang="en-US"/>
           </a:p>
@@ -2621,9 +2626,10 @@
           <a:lstStyle/>
           <a:p>
             <a:r>
-              <a:rPr lang="en-US"/>
+              <a:rPr lang="en-US" smtClean="0"/>
               <a:t>Click to edit Master title style</a:t>
             </a:r>
+            <a:endParaRPr lang="en-US"/>
           </a:p>
         </p:txBody>
       </p:sp>
@@ -2654,37 +2660,38 @@
           <a:p>
             <a:pPr lvl="0"/>
             <a:r>
-              <a:rPr lang="en-US"/>
+              <a:rPr lang="en-US" smtClean="0"/>
               <a:t>Click to edit Master text styles</a:t>
             </a:r>
           </a:p>
           <a:p>
             <a:pPr lvl="1"/>
             <a:r>
-              <a:rPr lang="en-US"/>
+              <a:rPr lang="en-US" smtClean="0"/>
               <a:t>Second level</a:t>
             </a:r>
           </a:p>
           <a:p>
             <a:pPr lvl="2"/>
             <a:r>
-              <a:rPr lang="en-US"/>
+              <a:rPr lang="en-US" smtClean="0"/>
               <a:t>Third level</a:t>
             </a:r>
           </a:p>
           <a:p>
             <a:pPr lvl="3"/>
             <a:r>
-              <a:rPr lang="en-US"/>
+              <a:rPr lang="en-US" smtClean="0"/>
               <a:t>Fourth level</a:t>
             </a:r>
           </a:p>
           <a:p>
             <a:pPr lvl="4"/>
             <a:r>
-              <a:rPr lang="en-US"/>
+              <a:rPr lang="en-US" smtClean="0"/>
               <a:t>Fifth level</a:t>
             </a:r>
+            <a:endParaRPr lang="en-US"/>
           </a:p>
         </p:txBody>
       </p:sp>
@@ -2723,7 +2730,7 @@
           <a:p>
             <a:fld id="{5BCAD085-E8A6-8845-BD4E-CB4CCA059FC4}" type="datetimeFigureOut">
               <a:rPr lang="en-US" smtClean="0"/>
-              <a:t>10/12/2026</a:t>
+              <a:t>1/27/13</a:t>
             </a:fld>
             <a:endParaRPr lang="en-US"/>
           </a:p>
@@ -3082,7 +3089,7 @@
 </file>
 
 <file path=ppt/slides/slide1.xml><?xml version="1.0" encoding="utf-8"?>
-<p:sld xmlns:a="http://schemas.openxmlformats.org/drawingml/2006/main" xmlns:r="http://schemas.openxmlformats.org/officeDocument/2006/relationships" xmlns:p="http://schemas.openxmlformats.org/presentationml/2006/main">
+<p:sld xmlns:a="http://schemas.openxmlformats.org/drawingml/2006/main" xmlns:p="http://schemas.openxmlformats.org/presentationml/2006/main" xmlns:r="http://schemas.openxmlformats.org/officeDocument/2006/relationships">
   <p:cSld>
     <p:spTree>
       <p:nvGrpSpPr>
@@ -3090,14 +3097,7 @@
         <p:cNvGrpSpPr/>
         <p:nvPr/>
       </p:nvGrpSpPr>
-      <p:grpSpPr>
-        <a:xfrm>
-          <a:off x="0" y="0"/>
-          <a:ext cx="0" cy="0"/>
-          <a:chOff x="0" y="0"/>
-          <a:chExt cx="0" cy="0"/>
-        </a:xfrm>
-      </p:grpSpPr>
+      <p:grpSpPr/>
       <p:sp>
         <p:nvSpPr>
           <p:cNvPr id="2" name="Rectangle 1"/>
@@ -3138,7 +3138,6 @@
           <a:lstStyle/>
           <a:p>
             <a:pPr algn="ctr"/>
-            <a:endParaRPr/>
           </a:p>
         </p:txBody>
       </p:sp>
@@ -3182,7 +3181,6 @@
           <a:lstStyle/>
           <a:p>
             <a:pPr algn="ctr"/>
-            <a:endParaRPr/>
           </a:p>
         </p:txBody>
       </p:sp>
@@ -3194,8 +3192,8 @@
         </p:nvSpPr>
         <p:spPr>
           <a:xfrm>
-            <a:off x="914400" y="1793564"/>
-            <a:ext cx="7772400" cy="2498120"/>
+            <a:off x="914400" y="1463040"/>
+            <a:ext cx="7772400" cy="4114800"/>
           </a:xfrm>
           <a:prstGeom prst="rect">
             <a:avLst/>
@@ -3215,7 +3213,9 @@
                 </a:solidFill>
               </a:defRPr>
             </a:pPr>
-            <a:endParaRPr dirty="0"/>
+            <a:r>
+              <a:t>OFFICIAL PROJECT STATUS &amp; ARCHITECTURE REPORT</a:t>
+            </a:r>
           </a:p>
           <a:p>
             <a:pPr>
@@ -3229,14 +3229,10 @@
               </a:defRPr>
             </a:pPr>
             <a:r>
-              <a:rPr dirty="0"/>
               <a:t>GPON Network Mapping &amp;</a:t>
             </a:r>
-            <a:br>
-              <a:rPr dirty="0"/>
-            </a:br>
-            <a:r>
-              <a:rPr dirty="0"/>
+            <a:br/>
+            <a:r>
               <a:t>Field Survey System</a:t>
             </a:r>
           </a:p>
@@ -3252,7 +3248,6 @@
               </a:defRPr>
             </a:pPr>
             <a:r>
-              <a:rPr dirty="0"/>
               <a:t>Enterprise GIS Infrastructure, Offline-First Mobile PWA &amp; Central Office Management Portal</a:t>
             </a:r>
           </a:p>
@@ -3267,7 +3262,9 @@
                 </a:solidFill>
               </a:defRPr>
             </a:pPr>
-            <a:endParaRPr dirty="0"/>
+            <a:r>
+              <a:t>Submitted to: Superior Officers / Circle Management | Kerala Telecom Operations | Production v2.4</a:t>
+            </a:r>
           </a:p>
         </p:txBody>
       </p:sp>
@@ -3303,8 +3300,8 @@
 </p:sld>
 </file>
 
-<file path=ppt/slides/slide2.xml><?xml version="1.0" encoding="utf-8"?>
-<p:sld xmlns:a="http://schemas.openxmlformats.org/drawingml/2006/main" xmlns:r="http://schemas.openxmlformats.org/officeDocument/2006/relationships" xmlns:p="http://schemas.openxmlformats.org/presentationml/2006/main">
+<file path=ppt/slides/slide10.xml><?xml version="1.0" encoding="utf-8"?>
+<p:sld xmlns:a="http://schemas.openxmlformats.org/drawingml/2006/main" xmlns:p="http://schemas.openxmlformats.org/presentationml/2006/main" xmlns:r="http://schemas.openxmlformats.org/officeDocument/2006/relationships">
   <p:cSld>
     <p:spTree>
       <p:nvGrpSpPr>
@@ -3312,14 +3309,7 @@
         <p:cNvGrpSpPr/>
         <p:nvPr/>
       </p:nvGrpSpPr>
-      <p:grpSpPr>
-        <a:xfrm>
-          <a:off x="0" y="0"/>
-          <a:ext cx="0" cy="0"/>
-          <a:chOff x="0" y="0"/>
-          <a:chExt cx="0" cy="0"/>
-        </a:xfrm>
-      </p:grpSpPr>
+      <p:grpSpPr/>
       <p:sp>
         <p:nvSpPr>
           <p:cNvPr id="2" name="TextBox 1"/>
@@ -3350,7 +3340,7 @@
               </a:defRPr>
             </a:pPr>
             <a:r>
-              <a:t>PROJECT OVERVIEW</a:t>
+              <a:t>OPERATIONAL STATUS</a:t>
             </a:r>
           </a:p>
           <a:p>
@@ -3365,7 +3355,7 @@
               </a:defRPr>
             </a:pPr>
             <a:r>
-              <a:t>Executive Summary &amp; Operational Mandate</a:t>
+              <a:t>Circle Deployment Status &amp; Field Footprint</a:t>
             </a:r>
           </a:p>
         </p:txBody>
@@ -3410,7 +3400,1082 @@
           <a:lstStyle/>
           <a:p>
             <a:pPr algn="ctr"/>
-            <a:endParaRPr/>
+          </a:p>
+        </p:txBody>
+      </p:sp>
+      <p:sp>
+        <p:nvSpPr>
+          <p:cNvPr id="4" name="Rounded Rectangle 3"/>
+          <p:cNvSpPr/>
+          <p:nvPr/>
+        </p:nvSpPr>
+        <p:spPr>
+          <a:xfrm>
+            <a:off x="731520" y="1645920"/>
+            <a:ext cx="3413455" cy="4663440"/>
+          </a:xfrm>
+          <a:prstGeom prst="roundRect">
+            <a:avLst/>
+          </a:prstGeom>
+          <a:solidFill>
+            <a:srgbClr val="F8FAFC"/>
+          </a:solidFill>
+          <a:ln>
+            <a:solidFill>
+              <a:srgbClr val="E2E8F0"/>
+            </a:solidFill>
+          </a:ln>
+        </p:spPr>
+        <p:style>
+          <a:lnRef idx="1">
+            <a:schemeClr val="accent1"/>
+          </a:lnRef>
+          <a:fillRef idx="3">
+            <a:schemeClr val="accent1"/>
+          </a:fillRef>
+          <a:effectRef idx="2">
+            <a:schemeClr val="accent1"/>
+          </a:effectRef>
+          <a:fontRef idx="minor">
+            <a:schemeClr val="lt1"/>
+          </a:fontRef>
+        </p:style>
+        <p:txBody>
+          <a:bodyPr rtlCol="0" anchor="ctr" wrap="square" lIns="228600" rIns="228600" tIns="228600"/>
+          <a:lstStyle/>
+          <a:p>
+            <a:pPr algn="ctr">
+              <a:defRPr sz="1100" b="1">
+                <a:solidFill>
+                  <a:srgbClr val="10B981"/>
+                </a:solidFill>
+              </a:defRPr>
+            </a:pPr>
+            <a:r>
+              <a:t>🟢 FULLY OPERATIONAL</a:t>
+            </a:r>
+          </a:p>
+          <a:p>
+            <a:pPr>
+              <a:spcBef>
+                <a:spcPts val="300"/>
+              </a:spcBef>
+              <a:defRPr sz="1600" b="1">
+                <a:solidFill>
+                  <a:srgbClr val="0F172A"/>
+                </a:solidFill>
+              </a:defRPr>
+            </a:pPr>
+            <a:r>
+              <a:t>Thrissur Telecom Circle</a:t>
+            </a:r>
+          </a:p>
+          <a:p>
+            <a:pPr>
+              <a:spcBef>
+                <a:spcPts val="600"/>
+              </a:spcBef>
+              <a:defRPr sz="1100">
+                <a:solidFill>
+                  <a:srgbClr val="64748B"/>
+                </a:solidFill>
+              </a:defRPr>
+            </a:pPr>
+            <a:r>
+              <a:t>Benchmark reference circle. High survey density across central and rural sub-divisions with zero reported downtime.</a:t>
+            </a:r>
+          </a:p>
+          <a:p>
+            <a:pPr>
+              <a:spcBef>
+                <a:spcPts val="400"/>
+              </a:spcBef>
+              <a:defRPr sz="800">
+                <a:solidFill>
+                  <a:srgbClr val="E2E8F0"/>
+                </a:solidFill>
+              </a:defRPr>
+            </a:pPr>
+            <a:r>
+              <a:t>─────────────────────</a:t>
+            </a:r>
+          </a:p>
+          <a:p>
+            <a:pPr>
+              <a:spcBef>
+                <a:spcPts val="600"/>
+              </a:spcBef>
+              <a:defRPr sz="1150" b="1">
+                <a:solidFill>
+                  <a:srgbClr val="1E293B"/>
+                </a:solidFill>
+              </a:defRPr>
+            </a:pPr>
+            <a:r>
+              <a:t>▪ Field Users: Active</a:t>
+            </a:r>
+          </a:p>
+          <a:p>
+            <a:pPr>
+              <a:spcBef>
+                <a:spcPts val="600"/>
+              </a:spcBef>
+              <a:defRPr sz="1150" b="1">
+                <a:solidFill>
+                  <a:srgbClr val="1E293B"/>
+                </a:solidFill>
+              </a:defRPr>
+            </a:pPr>
+            <a:r>
+              <a:t>▪ Surveys Logged: 1000+</a:t>
+            </a:r>
+          </a:p>
+          <a:p>
+            <a:pPr>
+              <a:spcBef>
+                <a:spcPts val="600"/>
+              </a:spcBef>
+              <a:defRPr sz="1150" b="1">
+                <a:solidFill>
+                  <a:srgbClr val="1E293B"/>
+                </a:solidFill>
+              </a:defRPr>
+            </a:pPr>
+            <a:r>
+              <a:t>▪ Sync Health: Optimal</a:t>
+            </a:r>
+          </a:p>
+        </p:txBody>
+      </p:sp>
+      <p:sp>
+        <p:nvSpPr>
+          <p:cNvPr id="5" name="Rounded Rectangle 4"/>
+          <p:cNvSpPr/>
+          <p:nvPr/>
+        </p:nvSpPr>
+        <p:spPr>
+          <a:xfrm>
+            <a:off x="4389120" y="1645920"/>
+            <a:ext cx="3413455" cy="4663440"/>
+          </a:xfrm>
+          <a:prstGeom prst="roundRect">
+            <a:avLst/>
+          </a:prstGeom>
+          <a:solidFill>
+            <a:srgbClr val="F8FAFC"/>
+          </a:solidFill>
+          <a:ln>
+            <a:solidFill>
+              <a:srgbClr val="E2E8F0"/>
+            </a:solidFill>
+          </a:ln>
+        </p:spPr>
+        <p:style>
+          <a:lnRef idx="1">
+            <a:schemeClr val="accent1"/>
+          </a:lnRef>
+          <a:fillRef idx="3">
+            <a:schemeClr val="accent1"/>
+          </a:fillRef>
+          <a:effectRef idx="2">
+            <a:schemeClr val="accent1"/>
+          </a:effectRef>
+          <a:fontRef idx="minor">
+            <a:schemeClr val="lt1"/>
+          </a:fontRef>
+        </p:style>
+        <p:txBody>
+          <a:bodyPr rtlCol="0" anchor="ctr" wrap="square" lIns="228600" rIns="228600" tIns="228600"/>
+          <a:lstStyle/>
+          <a:p>
+            <a:pPr algn="ctr">
+              <a:defRPr sz="1100" b="1">
+                <a:solidFill>
+                  <a:srgbClr val="10B981"/>
+                </a:solidFill>
+              </a:defRPr>
+            </a:pPr>
+            <a:r>
+              <a:t>🟢 FULLY OPERATIONAL</a:t>
+            </a:r>
+          </a:p>
+          <a:p>
+            <a:pPr>
+              <a:spcBef>
+                <a:spcPts val="300"/>
+              </a:spcBef>
+              <a:defRPr sz="1600" b="1">
+                <a:solidFill>
+                  <a:srgbClr val="0F172A"/>
+                </a:solidFill>
+              </a:defRPr>
+            </a:pPr>
+            <a:r>
+              <a:t>Kottayam Telecom Circle</a:t>
+            </a:r>
+          </a:p>
+          <a:p>
+            <a:pPr>
+              <a:spcBef>
+                <a:spcPts val="600"/>
+              </a:spcBef>
+              <a:defRPr sz="1100">
+                <a:solidFill>
+                  <a:srgbClr val="64748B"/>
+                </a:solidFill>
+              </a:defRPr>
+            </a:pPr>
+            <a:r>
+              <a:t>Synchronized with latest security guardrails and dropdown fixes. Active survey data ingestion across all mapped centers.</a:t>
+            </a:r>
+          </a:p>
+          <a:p>
+            <a:pPr>
+              <a:spcBef>
+                <a:spcPts val="400"/>
+              </a:spcBef>
+              <a:defRPr sz="800">
+                <a:solidFill>
+                  <a:srgbClr val="E2E8F0"/>
+                </a:solidFill>
+              </a:defRPr>
+            </a:pPr>
+            <a:r>
+              <a:t>─────────────────────</a:t>
+            </a:r>
+          </a:p>
+          <a:p>
+            <a:pPr>
+              <a:spcBef>
+                <a:spcPts val="600"/>
+              </a:spcBef>
+              <a:defRPr sz="1150" b="1">
+                <a:solidFill>
+                  <a:srgbClr val="1E293B"/>
+                </a:solidFill>
+              </a:defRPr>
+            </a:pPr>
+            <a:r>
+              <a:t>▪ Field Users: Active</a:t>
+            </a:r>
+          </a:p>
+          <a:p>
+            <a:pPr>
+              <a:spcBef>
+                <a:spcPts val="600"/>
+              </a:spcBef>
+              <a:defRPr sz="1150" b="1">
+                <a:solidFill>
+                  <a:srgbClr val="1E293B"/>
+                </a:solidFill>
+              </a:defRPr>
+            </a:pPr>
+            <a:r>
+              <a:t>▪ Hierarchy Cached: Yes</a:t>
+            </a:r>
+          </a:p>
+          <a:p>
+            <a:pPr>
+              <a:spcBef>
+                <a:spcPts val="600"/>
+              </a:spcBef>
+              <a:defRPr sz="1150" b="1">
+                <a:solidFill>
+                  <a:srgbClr val="1E293B"/>
+                </a:solidFill>
+              </a:defRPr>
+            </a:pPr>
+            <a:r>
+              <a:t>▪ Sync Health: Optimal</a:t>
+            </a:r>
+          </a:p>
+        </p:txBody>
+      </p:sp>
+      <p:sp>
+        <p:nvSpPr>
+          <p:cNvPr id="6" name="Rounded Rectangle 5"/>
+          <p:cNvSpPr/>
+          <p:nvPr/>
+        </p:nvSpPr>
+        <p:spPr>
+          <a:xfrm>
+            <a:off x="8046720" y="1645920"/>
+            <a:ext cx="3413455" cy="4663440"/>
+          </a:xfrm>
+          <a:prstGeom prst="roundRect">
+            <a:avLst/>
+          </a:prstGeom>
+          <a:solidFill>
+            <a:srgbClr val="F8FAFC"/>
+          </a:solidFill>
+          <a:ln>
+            <a:solidFill>
+              <a:srgbClr val="E2E8F0"/>
+            </a:solidFill>
+          </a:ln>
+        </p:spPr>
+        <p:style>
+          <a:lnRef idx="1">
+            <a:schemeClr val="accent1"/>
+          </a:lnRef>
+          <a:fillRef idx="3">
+            <a:schemeClr val="accent1"/>
+          </a:fillRef>
+          <a:effectRef idx="2">
+            <a:schemeClr val="accent1"/>
+          </a:effectRef>
+          <a:fontRef idx="minor">
+            <a:schemeClr val="lt1"/>
+          </a:fontRef>
+        </p:style>
+        <p:txBody>
+          <a:bodyPr rtlCol="0" anchor="ctr" wrap="square" lIns="228600" rIns="228600" tIns="228600"/>
+          <a:lstStyle/>
+          <a:p>
+            <a:pPr algn="ctr">
+              <a:defRPr sz="1100" b="1">
+                <a:solidFill>
+                  <a:srgbClr val="0284C7"/>
+                </a:solidFill>
+              </a:defRPr>
+            </a:pPr>
+            <a:r>
+              <a:t>🔵 ROLLOUT IN PROGRESS</a:t>
+            </a:r>
+          </a:p>
+          <a:p>
+            <a:pPr>
+              <a:spcBef>
+                <a:spcPts val="300"/>
+              </a:spcBef>
+              <a:defRPr sz="1600" b="1">
+                <a:solidFill>
+                  <a:srgbClr val="0F172A"/>
+                </a:solidFill>
+              </a:defRPr>
+            </a:pPr>
+            <a:r>
+              <a:t>Trivandrum Sub &amp; Ernakulam</a:t>
+            </a:r>
+          </a:p>
+          <a:p>
+            <a:pPr>
+              <a:spcBef>
+                <a:spcPts val="600"/>
+              </a:spcBef>
+              <a:defRPr sz="1100">
+                <a:solidFill>
+                  <a:srgbClr val="64748B"/>
+                </a:solidFill>
+              </a:defRPr>
+            </a:pPr>
+            <a:r>
+              <a:t>Node master data uploaded. Multi-center technician access provisioned; field survey team onboarding underway.</a:t>
+            </a:r>
+          </a:p>
+          <a:p>
+            <a:pPr>
+              <a:spcBef>
+                <a:spcPts val="400"/>
+              </a:spcBef>
+              <a:defRPr sz="800">
+                <a:solidFill>
+                  <a:srgbClr val="E2E8F0"/>
+                </a:solidFill>
+              </a:defRPr>
+            </a:pPr>
+            <a:r>
+              <a:t>─────────────────────</a:t>
+            </a:r>
+          </a:p>
+          <a:p>
+            <a:pPr>
+              <a:spcBef>
+                <a:spcPts val="600"/>
+              </a:spcBef>
+              <a:defRPr sz="1150" b="1">
+                <a:solidFill>
+                  <a:srgbClr val="1E293B"/>
+                </a:solidFill>
+              </a:defRPr>
+            </a:pPr>
+            <a:r>
+              <a:t>▪ Hierarchy Loaded: Yes</a:t>
+            </a:r>
+          </a:p>
+          <a:p>
+            <a:pPr>
+              <a:spcBef>
+                <a:spcPts val="600"/>
+              </a:spcBef>
+              <a:defRPr sz="1150" b="1">
+                <a:solidFill>
+                  <a:srgbClr val="1E293B"/>
+                </a:solidFill>
+              </a:defRPr>
+            </a:pPr>
+            <a:r>
+              <a:t>▪ Technicians Provisioned: Yes</a:t>
+            </a:r>
+          </a:p>
+          <a:p>
+            <a:pPr>
+              <a:spcBef>
+                <a:spcPts val="600"/>
+              </a:spcBef>
+              <a:defRPr sz="1150" b="1">
+                <a:solidFill>
+                  <a:srgbClr val="1E293B"/>
+                </a:solidFill>
+              </a:defRPr>
+            </a:pPr>
+            <a:r>
+              <a:t>▪ Target: Full Circle</a:t>
+            </a:r>
+          </a:p>
+        </p:txBody>
+      </p:sp>
+    </p:spTree>
+  </p:cSld>
+  <p:clrMapOvr>
+    <a:masterClrMapping/>
+  </p:clrMapOvr>
+</p:sld>
+</file>
+
+<file path=ppt/slides/slide11.xml><?xml version="1.0" encoding="utf-8"?>
+<p:sld xmlns:a="http://schemas.openxmlformats.org/drawingml/2006/main" xmlns:p="http://schemas.openxmlformats.org/presentationml/2006/main" xmlns:r="http://schemas.openxmlformats.org/officeDocument/2006/relationships">
+  <p:cSld>
+    <p:spTree>
+      <p:nvGrpSpPr>
+        <p:cNvPr id="1" name=""/>
+        <p:cNvGrpSpPr/>
+        <p:nvPr/>
+      </p:nvGrpSpPr>
+      <p:grpSpPr/>
+      <p:sp>
+        <p:nvSpPr>
+          <p:cNvPr id="2" name="TextBox 1"/>
+          <p:cNvSpPr txBox="1"/>
+          <p:nvPr/>
+        </p:nvSpPr>
+        <p:spPr>
+          <a:xfrm>
+            <a:off x="731520" y="411480"/>
+            <a:ext cx="10698480" cy="1005840"/>
+          </a:xfrm>
+          <a:prstGeom prst="rect">
+            <a:avLst/>
+          </a:prstGeom>
+          <a:noFill/>
+        </p:spPr>
+        <p:txBody>
+          <a:bodyPr wrap="square" lIns="0" tIns="0" rIns="0" bIns="0">
+            <a:spAutoFit/>
+          </a:bodyPr>
+          <a:lstStyle/>
+          <a:p>
+            <a:pPr>
+              <a:defRPr sz="1000" b="1">
+                <a:solidFill>
+                  <a:srgbClr val="0284C7"/>
+                </a:solidFill>
+              </a:defRPr>
+            </a:pPr>
+            <a:r>
+              <a:t>EXECUTIVE RECOMMENDATIONS</a:t>
+            </a:r>
+          </a:p>
+          <a:p>
+            <a:pPr>
+              <a:spcBef>
+                <a:spcPts val="300"/>
+              </a:spcBef>
+              <a:defRPr sz="2500" b="1">
+                <a:solidFill>
+                  <a:srgbClr val="0F172A"/>
+                </a:solidFill>
+              </a:defRPr>
+            </a:pPr>
+            <a:r>
+              <a:t>Strategic Roadmap &amp; Future Capabilities</a:t>
+            </a:r>
+          </a:p>
+        </p:txBody>
+      </p:sp>
+      <p:sp>
+        <p:nvSpPr>
+          <p:cNvPr id="3" name="Rectangle 2"/>
+          <p:cNvSpPr/>
+          <p:nvPr/>
+        </p:nvSpPr>
+        <p:spPr>
+          <a:xfrm>
+            <a:off x="731520" y="1371600"/>
+            <a:ext cx="10728655" cy="18288"/>
+          </a:xfrm>
+          <a:prstGeom prst="rect">
+            <a:avLst/>
+          </a:prstGeom>
+          <a:solidFill>
+            <a:srgbClr val="E2E8F0"/>
+          </a:solidFill>
+          <a:ln>
+            <a:noFill/>
+          </a:ln>
+        </p:spPr>
+        <p:style>
+          <a:lnRef idx="1">
+            <a:schemeClr val="accent1"/>
+          </a:lnRef>
+          <a:fillRef idx="3">
+            <a:schemeClr val="accent1"/>
+          </a:fillRef>
+          <a:effectRef idx="2">
+            <a:schemeClr val="accent1"/>
+          </a:effectRef>
+          <a:fontRef idx="minor">
+            <a:schemeClr val="lt1"/>
+          </a:fontRef>
+        </p:style>
+        <p:txBody>
+          <a:bodyPr rtlCol="0" anchor="ctr"/>
+          <a:lstStyle/>
+          <a:p>
+            <a:pPr algn="ctr"/>
+          </a:p>
+        </p:txBody>
+      </p:sp>
+      <p:sp>
+        <p:nvSpPr>
+          <p:cNvPr id="4" name="Rounded Rectangle 3"/>
+          <p:cNvSpPr/>
+          <p:nvPr/>
+        </p:nvSpPr>
+        <p:spPr>
+          <a:xfrm>
+            <a:off x="731520" y="1645920"/>
+            <a:ext cx="3413455" cy="3931920"/>
+          </a:xfrm>
+          <a:prstGeom prst="roundRect">
+            <a:avLst/>
+          </a:prstGeom>
+          <a:solidFill>
+            <a:srgbClr val="F8FAFC"/>
+          </a:solidFill>
+          <a:ln>
+            <a:solidFill>
+              <a:srgbClr val="10B981"/>
+            </a:solidFill>
+          </a:ln>
+        </p:spPr>
+        <p:style>
+          <a:lnRef idx="1">
+            <a:schemeClr val="accent1"/>
+          </a:lnRef>
+          <a:fillRef idx="3">
+            <a:schemeClr val="accent1"/>
+          </a:fillRef>
+          <a:effectRef idx="2">
+            <a:schemeClr val="accent1"/>
+          </a:effectRef>
+          <a:fontRef idx="minor">
+            <a:schemeClr val="lt1"/>
+          </a:fontRef>
+        </p:style>
+        <p:txBody>
+          <a:bodyPr rtlCol="0" anchor="ctr" wrap="square" lIns="228600" rIns="228600" tIns="228600"/>
+          <a:lstStyle/>
+          <a:p>
+            <a:pPr algn="ctr">
+              <a:defRPr sz="1000" b="1">
+                <a:solidFill>
+                  <a:srgbClr val="10B981"/>
+                </a:solidFill>
+              </a:defRPr>
+            </a:pPr>
+            <a:r>
+              <a:t>PHASE 1 (CURRENT ACHIEVED)</a:t>
+            </a:r>
+          </a:p>
+          <a:p>
+            <a:pPr>
+              <a:spcBef>
+                <a:spcPts val="300"/>
+              </a:spcBef>
+              <a:defRPr sz="1500" b="1">
+                <a:solidFill>
+                  <a:srgbClr val="0F172A"/>
+                </a:solidFill>
+              </a:defRPr>
+            </a:pPr>
+            <a:r>
+              <a:t>GIS Pole &amp; Node Digitalization</a:t>
+            </a:r>
+          </a:p>
+          <a:p>
+            <a:pPr>
+              <a:spcBef>
+                <a:spcPts val="400"/>
+              </a:spcBef>
+              <a:defRPr sz="800">
+                <a:solidFill>
+                  <a:srgbClr val="E2E8F0"/>
+                </a:solidFill>
+              </a:defRPr>
+            </a:pPr>
+            <a:r>
+              <a:t>─────────────────────</a:t>
+            </a:r>
+          </a:p>
+          <a:p>
+            <a:pPr>
+              <a:spcBef>
+                <a:spcPts val="600"/>
+              </a:spcBef>
+              <a:defRPr sz="1100">
+                <a:solidFill>
+                  <a:srgbClr val="1E293B"/>
+                </a:solidFill>
+              </a:defRPr>
+            </a:pPr>
+            <a:r>
+              <a:t>• Full transition to mobile PWA field survey.</a:t>
+            </a:r>
+          </a:p>
+          <a:p>
+            <a:pPr>
+              <a:spcBef>
+                <a:spcPts val="600"/>
+              </a:spcBef>
+              <a:defRPr sz="1100">
+                <a:solidFill>
+                  <a:srgbClr val="1E293B"/>
+                </a:solidFill>
+              </a:defRPr>
+            </a:pPr>
+            <a:r>
+              <a:t>• Cascading validation for Region, Center &amp; RT Room.</a:t>
+            </a:r>
+          </a:p>
+          <a:p>
+            <a:pPr>
+              <a:spcBef>
+                <a:spcPts val="600"/>
+              </a:spcBef>
+              <a:defRPr sz="1100">
+                <a:solidFill>
+                  <a:srgbClr val="1E293B"/>
+                </a:solidFill>
+              </a:defRPr>
+            </a:pPr>
+            <a:r>
+              <a:t>• Robust offline caching and multi-center user governance.</a:t>
+            </a:r>
+          </a:p>
+        </p:txBody>
+      </p:sp>
+      <p:sp>
+        <p:nvSpPr>
+          <p:cNvPr id="5" name="Rounded Rectangle 4"/>
+          <p:cNvSpPr/>
+          <p:nvPr/>
+        </p:nvSpPr>
+        <p:spPr>
+          <a:xfrm>
+            <a:off x="4389120" y="1645920"/>
+            <a:ext cx="3413455" cy="3931920"/>
+          </a:xfrm>
+          <a:prstGeom prst="roundRect">
+            <a:avLst/>
+          </a:prstGeom>
+          <a:solidFill>
+            <a:srgbClr val="F8FAFC"/>
+          </a:solidFill>
+          <a:ln>
+            <a:solidFill>
+              <a:srgbClr val="0284C7"/>
+            </a:solidFill>
+          </a:ln>
+        </p:spPr>
+        <p:style>
+          <a:lnRef idx="1">
+            <a:schemeClr val="accent1"/>
+          </a:lnRef>
+          <a:fillRef idx="3">
+            <a:schemeClr val="accent1"/>
+          </a:fillRef>
+          <a:effectRef idx="2">
+            <a:schemeClr val="accent1"/>
+          </a:effectRef>
+          <a:fontRef idx="minor">
+            <a:schemeClr val="lt1"/>
+          </a:fontRef>
+        </p:style>
+        <p:txBody>
+          <a:bodyPr rtlCol="0" anchor="ctr" wrap="square" lIns="228600" rIns="228600" tIns="228600"/>
+          <a:lstStyle/>
+          <a:p>
+            <a:pPr algn="ctr">
+              <a:defRPr sz="1000" b="1">
+                <a:solidFill>
+                  <a:srgbClr val="0284C7"/>
+                </a:solidFill>
+              </a:defRPr>
+            </a:pPr>
+            <a:r>
+              <a:t>PHASE 2 (RECOMMENDED Q1)</a:t>
+            </a:r>
+          </a:p>
+          <a:p>
+            <a:pPr>
+              <a:spcBef>
+                <a:spcPts val="300"/>
+              </a:spcBef>
+              <a:defRPr sz="1500" b="1">
+                <a:solidFill>
+                  <a:srgbClr val="0F172A"/>
+                </a:solidFill>
+              </a:defRPr>
+            </a:pPr>
+            <a:r>
+              <a:t>Automated Optical Route Tracing</a:t>
+            </a:r>
+          </a:p>
+          <a:p>
+            <a:pPr>
+              <a:spcBef>
+                <a:spcPts val="400"/>
+              </a:spcBef>
+              <a:defRPr sz="800">
+                <a:solidFill>
+                  <a:srgbClr val="E2E8F0"/>
+                </a:solidFill>
+              </a:defRPr>
+            </a:pPr>
+            <a:r>
+              <a:t>─────────────────────</a:t>
+            </a:r>
+          </a:p>
+          <a:p>
+            <a:pPr>
+              <a:spcBef>
+                <a:spcPts val="600"/>
+              </a:spcBef>
+              <a:defRPr sz="1100">
+                <a:solidFill>
+                  <a:srgbClr val="1E293B"/>
+                </a:solidFill>
+              </a:defRPr>
+            </a:pPr>
+            <a:r>
+              <a:t>• Vector line rendering connecting physical KSEB poles.</a:t>
+            </a:r>
+          </a:p>
+          <a:p>
+            <a:pPr>
+              <a:spcBef>
+                <a:spcPts val="600"/>
+              </a:spcBef>
+              <a:defRPr sz="1100">
+                <a:solidFill>
+                  <a:srgbClr val="1E293B"/>
+                </a:solidFill>
+              </a:defRPr>
+            </a:pPr>
+            <a:r>
+              <a:t>• Automated end-to-end fiber span distance calculations.</a:t>
+            </a:r>
+          </a:p>
+          <a:p>
+            <a:pPr>
+              <a:spcBef>
+                <a:spcPts val="600"/>
+              </a:spcBef>
+              <a:defRPr sz="1100">
+                <a:solidFill>
+                  <a:srgbClr val="1E293B"/>
+                </a:solidFill>
+              </a:defRPr>
+            </a:pPr>
+            <a:r>
+              <a:t>• Interactive spatial GIS map overlay for central planners.</a:t>
+            </a:r>
+          </a:p>
+        </p:txBody>
+      </p:sp>
+      <p:sp>
+        <p:nvSpPr>
+          <p:cNvPr id="6" name="Rounded Rectangle 5"/>
+          <p:cNvSpPr/>
+          <p:nvPr/>
+        </p:nvSpPr>
+        <p:spPr>
+          <a:xfrm>
+            <a:off x="8046720" y="1645920"/>
+            <a:ext cx="3413455" cy="3931920"/>
+          </a:xfrm>
+          <a:prstGeom prst="roundRect">
+            <a:avLst/>
+          </a:prstGeom>
+          <a:solidFill>
+            <a:srgbClr val="F8FAFC"/>
+          </a:solidFill>
+          <a:ln>
+            <a:solidFill>
+              <a:srgbClr val="1E293B"/>
+            </a:solidFill>
+          </a:ln>
+        </p:spPr>
+        <p:style>
+          <a:lnRef idx="1">
+            <a:schemeClr val="accent1"/>
+          </a:lnRef>
+          <a:fillRef idx="3">
+            <a:schemeClr val="accent1"/>
+          </a:fillRef>
+          <a:effectRef idx="2">
+            <a:schemeClr val="accent1"/>
+          </a:effectRef>
+          <a:fontRef idx="minor">
+            <a:schemeClr val="lt1"/>
+          </a:fontRef>
+        </p:style>
+        <p:txBody>
+          <a:bodyPr rtlCol="0" anchor="ctr" wrap="square" lIns="228600" rIns="228600" tIns="228600"/>
+          <a:lstStyle/>
+          <a:p>
+            <a:pPr algn="ctr">
+              <a:defRPr sz="1000" b="1">
+                <a:solidFill>
+                  <a:srgbClr val="1E293B"/>
+                </a:solidFill>
+              </a:defRPr>
+            </a:pPr>
+            <a:r>
+              <a:t>PHASE 3 (STRATEGIC Q2-Q3)</a:t>
+            </a:r>
+          </a:p>
+          <a:p>
+            <a:pPr>
+              <a:spcBef>
+                <a:spcPts val="300"/>
+              </a:spcBef>
+              <a:defRPr sz="1500" b="1">
+                <a:solidFill>
+                  <a:srgbClr val="0F172A"/>
+                </a:solidFill>
+              </a:defRPr>
+            </a:pPr>
+            <a:r>
+              <a:t>Optical Power &amp; OSS/BSS Integration</a:t>
+            </a:r>
+          </a:p>
+          <a:p>
+            <a:pPr>
+              <a:spcBef>
+                <a:spcPts val="400"/>
+              </a:spcBef>
+              <a:defRPr sz="800">
+                <a:solidFill>
+                  <a:srgbClr val="E2E8F0"/>
+                </a:solidFill>
+              </a:defRPr>
+            </a:pPr>
+            <a:r>
+              <a:t>─────────────────────</a:t>
+            </a:r>
+          </a:p>
+          <a:p>
+            <a:pPr>
+              <a:spcBef>
+                <a:spcPts val="600"/>
+              </a:spcBef>
+              <a:defRPr sz="1100">
+                <a:solidFill>
+                  <a:srgbClr val="1E293B"/>
+                </a:solidFill>
+              </a:defRPr>
+            </a:pPr>
+            <a:r>
+              <a:t>• Optical Power Budget (dBm) loss heatmap tracking.</a:t>
+            </a:r>
+          </a:p>
+          <a:p>
+            <a:pPr>
+              <a:spcBef>
+                <a:spcPts val="600"/>
+              </a:spcBef>
+              <a:defRPr sz="1100">
+                <a:solidFill>
+                  <a:srgbClr val="1E293B"/>
+                </a:solidFill>
+              </a:defRPr>
+            </a:pPr>
+            <a:r>
+              <a:t>• Direct API connectivity to telecom billing and CRM engines.</a:t>
+            </a:r>
+          </a:p>
+          <a:p>
+            <a:pPr>
+              <a:spcBef>
+                <a:spcPts val="600"/>
+              </a:spcBef>
+              <a:defRPr sz="1100">
+                <a:solidFill>
+                  <a:srgbClr val="1E293B"/>
+                </a:solidFill>
+              </a:defRPr>
+            </a:pPr>
+            <a:r>
+              <a:t>• Automated fault location triangulation on physical field maps.</a:t>
+            </a:r>
+          </a:p>
+        </p:txBody>
+      </p:sp>
+      <p:sp>
+        <p:nvSpPr>
+          <p:cNvPr id="7" name="TextBox 6"/>
+          <p:cNvSpPr txBox="1"/>
+          <p:nvPr/>
+        </p:nvSpPr>
+        <p:spPr>
+          <a:xfrm>
+            <a:off x="731520" y="5760720"/>
+            <a:ext cx="10728655" cy="731520"/>
+          </a:xfrm>
+          <a:prstGeom prst="rect">
+            <a:avLst/>
+          </a:prstGeom>
+          <a:noFill/>
+        </p:spPr>
+        <p:txBody>
+          <a:bodyPr wrap="square" lIns="0" tIns="0" rIns="0" bIns="0">
+            <a:spAutoFit/>
+          </a:bodyPr>
+          <a:lstStyle/>
+          <a:p>
+            <a:pPr>
+              <a:defRPr sz="1150" b="1">
+                <a:solidFill>
+                  <a:srgbClr val="0F172A"/>
+                </a:solidFill>
+              </a:defRPr>
+            </a:pPr>
+            <a:r>
+              <a:t>Summary Conclusion: The GPON Network Mapping platform delivers a high-accuracy, cost-effective, and fully resilient GIS foundation. System is fully production-ready for circle-wide expansion.</a:t>
+            </a:r>
+          </a:p>
+        </p:txBody>
+      </p:sp>
+    </p:spTree>
+  </p:cSld>
+  <p:clrMapOvr>
+    <a:masterClrMapping/>
+  </p:clrMapOvr>
+</p:sld>
+</file>
+
+<file path=ppt/slides/slide2.xml><?xml version="1.0" encoding="utf-8"?>
+<p:sld xmlns:a="http://schemas.openxmlformats.org/drawingml/2006/main" xmlns:p="http://schemas.openxmlformats.org/presentationml/2006/main" xmlns:r="http://schemas.openxmlformats.org/officeDocument/2006/relationships">
+  <p:cSld>
+    <p:spTree>
+      <p:nvGrpSpPr>
+        <p:cNvPr id="1" name=""/>
+        <p:cNvGrpSpPr/>
+        <p:nvPr/>
+      </p:nvGrpSpPr>
+      <p:grpSpPr/>
+      <p:sp>
+        <p:nvSpPr>
+          <p:cNvPr id="2" name="TextBox 1"/>
+          <p:cNvSpPr txBox="1"/>
+          <p:nvPr/>
+        </p:nvSpPr>
+        <p:spPr>
+          <a:xfrm>
+            <a:off x="731520" y="411480"/>
+            <a:ext cx="10698480" cy="1005840"/>
+          </a:xfrm>
+          <a:prstGeom prst="rect">
+            <a:avLst/>
+          </a:prstGeom>
+          <a:noFill/>
+        </p:spPr>
+        <p:txBody>
+          <a:bodyPr wrap="square" lIns="0" tIns="0" rIns="0" bIns="0">
+            <a:spAutoFit/>
+          </a:bodyPr>
+          <a:lstStyle/>
+          <a:p>
+            <a:pPr>
+              <a:defRPr sz="1000" b="1">
+                <a:solidFill>
+                  <a:srgbClr val="0284C7"/>
+                </a:solidFill>
+              </a:defRPr>
+            </a:pPr>
+            <a:r>
+              <a:t>PROJECT OVERVIEW</a:t>
+            </a:r>
+          </a:p>
+          <a:p>
+            <a:pPr>
+              <a:spcBef>
+                <a:spcPts val="300"/>
+              </a:spcBef>
+              <a:defRPr sz="2500" b="1">
+                <a:solidFill>
+                  <a:srgbClr val="0F172A"/>
+                </a:solidFill>
+              </a:defRPr>
+            </a:pPr>
+            <a:r>
+              <a:t>Executive Summary &amp; Operational Mandate</a:t>
+            </a:r>
+          </a:p>
+        </p:txBody>
+      </p:sp>
+      <p:sp>
+        <p:nvSpPr>
+          <p:cNvPr id="3" name="Rectangle 2"/>
+          <p:cNvSpPr/>
+          <p:nvPr/>
+        </p:nvSpPr>
+        <p:spPr>
+          <a:xfrm>
+            <a:off x="731520" y="1371600"/>
+            <a:ext cx="10728655" cy="18288"/>
+          </a:xfrm>
+          <a:prstGeom prst="rect">
+            <a:avLst/>
+          </a:prstGeom>
+          <a:solidFill>
+            <a:srgbClr val="E2E8F0"/>
+          </a:solidFill>
+          <a:ln>
+            <a:noFill/>
+          </a:ln>
+        </p:spPr>
+        <p:style>
+          <a:lnRef idx="1">
+            <a:schemeClr val="accent1"/>
+          </a:lnRef>
+          <a:fillRef idx="3">
+            <a:schemeClr val="accent1"/>
+          </a:fillRef>
+          <a:effectRef idx="2">
+            <a:schemeClr val="accent1"/>
+          </a:effectRef>
+          <a:fontRef idx="minor">
+            <a:schemeClr val="lt1"/>
+          </a:fontRef>
+        </p:style>
+        <p:txBody>
+          <a:bodyPr rtlCol="0" anchor="ctr"/>
+          <a:lstStyle/>
+          <a:p>
+            <a:pPr algn="ctr"/>
           </a:p>
         </p:txBody>
       </p:sp>
@@ -3452,7 +4517,7 @@
           </a:fontRef>
         </p:style>
         <p:txBody>
-          <a:bodyPr wrap="square" lIns="228600" tIns="182880" rIns="228600" rtlCol="0" anchor="ctr"/>
+          <a:bodyPr rtlCol="0" anchor="ctr" wrap="square" lIns="228600" rIns="228600" tIns="182880"/>
           <a:lstStyle/>
           <a:p>
             <a:pPr algn="ctr">
@@ -3536,7 +4601,7 @@
           </a:fontRef>
         </p:style>
         <p:txBody>
-          <a:bodyPr wrap="square" lIns="228600" tIns="182880" rIns="228600" rtlCol="0" anchor="ctr"/>
+          <a:bodyPr rtlCol="0" anchor="ctr" wrap="square" lIns="228600" rIns="228600" tIns="182880"/>
           <a:lstStyle/>
           <a:p>
             <a:pPr algn="ctr">
@@ -3620,7 +4685,7 @@
           </a:fontRef>
         </p:style>
         <p:txBody>
-          <a:bodyPr wrap="square" lIns="228600" tIns="182880" rIns="228600" rtlCol="0" anchor="ctr"/>
+          <a:bodyPr rtlCol="0" anchor="ctr" wrap="square" lIns="228600" rIns="228600" tIns="182880"/>
           <a:lstStyle/>
           <a:p>
             <a:pPr algn="ctr">
@@ -3704,7 +4769,7 @@
           </a:fontRef>
         </p:style>
         <p:txBody>
-          <a:bodyPr wrap="square" lIns="320040" tIns="228600" rIns="320040" rtlCol="0" anchor="ctr"/>
+          <a:bodyPr rtlCol="0" anchor="ctr" wrap="square" lIns="320040" rIns="320040" tIns="228600"/>
           <a:lstStyle/>
           <a:p>
             <a:pPr algn="ctr">
@@ -3789,7 +4854,7 @@
 </file>
 
 <file path=ppt/slides/slide3.xml><?xml version="1.0" encoding="utf-8"?>
-<p:sld xmlns:a="http://schemas.openxmlformats.org/drawingml/2006/main" xmlns:r="http://schemas.openxmlformats.org/officeDocument/2006/relationships" xmlns:p="http://schemas.openxmlformats.org/presentationml/2006/main">
+<p:sld xmlns:a="http://schemas.openxmlformats.org/drawingml/2006/main" xmlns:p="http://schemas.openxmlformats.org/presentationml/2006/main" xmlns:r="http://schemas.openxmlformats.org/officeDocument/2006/relationships">
   <p:cSld>
     <p:spTree>
       <p:nvGrpSpPr>
@@ -3797,14 +4862,7 @@
         <p:cNvGrpSpPr/>
         <p:nvPr/>
       </p:nvGrpSpPr>
-      <p:grpSpPr>
-        <a:xfrm>
-          <a:off x="0" y="0"/>
-          <a:ext cx="0" cy="0"/>
-          <a:chOff x="0" y="0"/>
-          <a:chExt cx="0" cy="0"/>
-        </a:xfrm>
-      </p:grpSpPr>
+      <p:grpSpPr/>
       <p:sp>
         <p:nvSpPr>
           <p:cNvPr id="2" name="TextBox 1"/>
@@ -3895,7 +4953,6 @@
           <a:lstStyle/>
           <a:p>
             <a:pPr algn="ctr"/>
-            <a:endParaRPr/>
           </a:p>
         </p:txBody>
       </p:sp>
@@ -3937,7 +4994,7 @@
           </a:fontRef>
         </p:style>
         <p:txBody>
-          <a:bodyPr wrap="square" lIns="274320" tIns="228600" rIns="274320" rtlCol="0" anchor="ctr"/>
+          <a:bodyPr rtlCol="0" anchor="ctr" wrap="square" lIns="274320" rIns="274320" tIns="228600"/>
           <a:lstStyle/>
           <a:p>
             <a:pPr algn="ctr">
@@ -4106,7 +5163,7 @@
           </a:fontRef>
         </p:style>
         <p:txBody>
-          <a:bodyPr wrap="square" lIns="274320" tIns="228600" rIns="274320" rtlCol="0" anchor="ctr"/>
+          <a:bodyPr rtlCol="0" anchor="ctr" wrap="square" lIns="274320" rIns="274320" tIns="228600"/>
           <a:lstStyle/>
           <a:p>
             <a:pPr algn="ctr">
@@ -4246,7 +5303,7 @@
 </file>
 
 <file path=ppt/slides/slide4.xml><?xml version="1.0" encoding="utf-8"?>
-<p:sld xmlns:a="http://schemas.openxmlformats.org/drawingml/2006/main" xmlns:r="http://schemas.openxmlformats.org/officeDocument/2006/relationships" xmlns:p="http://schemas.openxmlformats.org/presentationml/2006/main">
+<p:sld xmlns:a="http://schemas.openxmlformats.org/drawingml/2006/main" xmlns:p="http://schemas.openxmlformats.org/presentationml/2006/main" xmlns:r="http://schemas.openxmlformats.org/officeDocument/2006/relationships">
   <p:cSld>
     <p:spTree>
       <p:nvGrpSpPr>
@@ -4254,14 +5311,7 @@
         <p:cNvGrpSpPr/>
         <p:nvPr/>
       </p:nvGrpSpPr>
-      <p:grpSpPr>
-        <a:xfrm>
-          <a:off x="0" y="0"/>
-          <a:ext cx="0" cy="0"/>
-          <a:chOff x="0" y="0"/>
-          <a:chExt cx="0" cy="0"/>
-        </a:xfrm>
-      </p:grpSpPr>
+      <p:grpSpPr/>
       <p:sp>
         <p:nvSpPr>
           <p:cNvPr id="2" name="TextBox 1"/>
@@ -4352,7 +5402,6 @@
           <a:lstStyle/>
           <a:p>
             <a:pPr algn="ctr"/>
-            <a:endParaRPr/>
           </a:p>
         </p:txBody>
       </p:sp>
@@ -4394,7 +5443,7 @@
           </a:fontRef>
         </p:style>
         <p:txBody>
-          <a:bodyPr wrap="square" lIns="182880" tIns="182880" rIns="182880" rtlCol="0" anchor="ctr"/>
+          <a:bodyPr rtlCol="0" anchor="ctr" wrap="square" lIns="182880" rIns="182880" tIns="182880"/>
           <a:lstStyle/>
           <a:p>
             <a:pPr algn="ctr">
@@ -4538,7 +5587,7 @@
           </a:fontRef>
         </p:style>
         <p:txBody>
-          <a:bodyPr wrap="square" lIns="182880" tIns="182880" rIns="182880" rtlCol="0" anchor="ctr"/>
+          <a:bodyPr rtlCol="0" anchor="ctr" wrap="square" lIns="182880" rIns="182880" tIns="182880"/>
           <a:lstStyle/>
           <a:p>
             <a:pPr algn="ctr">
@@ -4682,7 +5731,7 @@
           </a:fontRef>
         </p:style>
         <p:txBody>
-          <a:bodyPr wrap="square" lIns="182880" tIns="182880" rIns="182880" rtlCol="0" anchor="ctr"/>
+          <a:bodyPr rtlCol="0" anchor="ctr" wrap="square" lIns="182880" rIns="182880" tIns="182880"/>
           <a:lstStyle/>
           <a:p>
             <a:pPr algn="ctr">
@@ -4826,7 +5875,7 @@
           </a:fontRef>
         </p:style>
         <p:txBody>
-          <a:bodyPr wrap="square" lIns="182880" tIns="182880" rIns="182880" rtlCol="0" anchor="ctr"/>
+          <a:bodyPr rtlCol="0" anchor="ctr" wrap="square" lIns="182880" rIns="182880" tIns="182880"/>
           <a:lstStyle/>
           <a:p>
             <a:pPr algn="ctr">
@@ -4941,7 +5990,7 @@
 </file>
 
 <file path=ppt/slides/slide5.xml><?xml version="1.0" encoding="utf-8"?>
-<p:sld xmlns:a="http://schemas.openxmlformats.org/drawingml/2006/main" xmlns:r="http://schemas.openxmlformats.org/officeDocument/2006/relationships" xmlns:p="http://schemas.openxmlformats.org/presentationml/2006/main">
+<p:sld xmlns:a="http://schemas.openxmlformats.org/drawingml/2006/main" xmlns:p="http://schemas.openxmlformats.org/presentationml/2006/main" xmlns:r="http://schemas.openxmlformats.org/officeDocument/2006/relationships">
   <p:cSld>
     <p:spTree>
       <p:nvGrpSpPr>
@@ -4949,14 +5998,7 @@
         <p:cNvGrpSpPr/>
         <p:nvPr/>
       </p:nvGrpSpPr>
-      <p:grpSpPr>
-        <a:xfrm>
-          <a:off x="0" y="0"/>
-          <a:ext cx="0" cy="0"/>
-          <a:chOff x="0" y="0"/>
-          <a:chExt cx="0" cy="0"/>
-        </a:xfrm>
-      </p:grpSpPr>
+      <p:grpSpPr/>
       <p:sp>
         <p:nvSpPr>
           <p:cNvPr id="2" name="TextBox 1"/>
@@ -5047,7 +6089,6 @@
           <a:lstStyle/>
           <a:p>
             <a:pPr algn="ctr"/>
-            <a:endParaRPr/>
           </a:p>
         </p:txBody>
       </p:sp>
@@ -5089,7 +6130,7 @@
           </a:fontRef>
         </p:style>
         <p:txBody>
-          <a:bodyPr wrap="square" lIns="228600" tIns="109728" rIns="228600" rtlCol="0" anchor="ctr"/>
+          <a:bodyPr rtlCol="0" anchor="ctr" wrap="square" lIns="228600" rIns="228600" tIns="109728"/>
           <a:lstStyle/>
           <a:p>
             <a:pPr algn="ctr">
@@ -5158,7 +6199,7 @@
           </a:fontRef>
         </p:style>
         <p:txBody>
-          <a:bodyPr wrap="square" lIns="228600" tIns="109728" rIns="228600" rtlCol="0" anchor="ctr"/>
+          <a:bodyPr rtlCol="0" anchor="ctr" wrap="square" lIns="228600" rIns="228600" tIns="109728"/>
           <a:lstStyle/>
           <a:p>
             <a:pPr algn="ctr">
@@ -5227,7 +6268,7 @@
           </a:fontRef>
         </p:style>
         <p:txBody>
-          <a:bodyPr wrap="square" lIns="228600" tIns="109728" rIns="228600" rtlCol="0" anchor="ctr"/>
+          <a:bodyPr rtlCol="0" anchor="ctr" wrap="square" lIns="228600" rIns="228600" tIns="109728"/>
           <a:lstStyle/>
           <a:p>
             <a:pPr algn="ctr">
@@ -5296,7 +6337,7 @@
           </a:fontRef>
         </p:style>
         <p:txBody>
-          <a:bodyPr wrap="square" lIns="228600" tIns="109728" rIns="228600" rtlCol="0" anchor="ctr"/>
+          <a:bodyPr rtlCol="0" anchor="ctr" wrap="square" lIns="228600" rIns="228600" tIns="109728"/>
           <a:lstStyle/>
           <a:p>
             <a:pPr algn="ctr">
@@ -5365,7 +6406,7 @@
           </a:fontRef>
         </p:style>
         <p:txBody>
-          <a:bodyPr wrap="square" lIns="228600" tIns="109728" rIns="228600" rtlCol="0" anchor="ctr"/>
+          <a:bodyPr rtlCol="0" anchor="ctr" wrap="square" lIns="228600" rIns="228600" tIns="109728"/>
           <a:lstStyle/>
           <a:p>
             <a:pPr algn="ctr">
@@ -5405,7 +6446,7 @@
 </file>
 
 <file path=ppt/slides/slide6.xml><?xml version="1.0" encoding="utf-8"?>
-<p:sld xmlns:a="http://schemas.openxmlformats.org/drawingml/2006/main" xmlns:r="http://schemas.openxmlformats.org/officeDocument/2006/relationships" xmlns:p="http://schemas.openxmlformats.org/presentationml/2006/main">
+<p:sld xmlns:a="http://schemas.openxmlformats.org/drawingml/2006/main" xmlns:p="http://schemas.openxmlformats.org/presentationml/2006/main" xmlns:r="http://schemas.openxmlformats.org/officeDocument/2006/relationships">
   <p:cSld>
     <p:spTree>
       <p:nvGrpSpPr>
@@ -5413,14 +6454,7 @@
         <p:cNvGrpSpPr/>
         <p:nvPr/>
       </p:nvGrpSpPr>
-      <p:grpSpPr>
-        <a:xfrm>
-          <a:off x="0" y="0"/>
-          <a:ext cx="0" cy="0"/>
-          <a:chOff x="0" y="0"/>
-          <a:chExt cx="0" cy="0"/>
-        </a:xfrm>
-      </p:grpSpPr>
+      <p:grpSpPr/>
       <p:sp>
         <p:nvSpPr>
           <p:cNvPr id="2" name="TextBox 1"/>
@@ -5511,7 +6545,6 @@
           <a:lstStyle/>
           <a:p>
             <a:pPr algn="ctr"/>
-            <a:endParaRPr/>
           </a:p>
         </p:txBody>
       </p:sp>
@@ -5553,7 +6586,7 @@
           </a:fontRef>
         </p:style>
         <p:txBody>
-          <a:bodyPr wrap="square" lIns="164592" tIns="228600" rIns="164592" rtlCol="0" anchor="ctr"/>
+          <a:bodyPr rtlCol="0" anchor="ctr" wrap="square" lIns="164592" rIns="164592" tIns="228600"/>
           <a:lstStyle/>
           <a:p>
             <a:pPr algn="ctr">
@@ -5637,7 +6670,7 @@
           </a:fontRef>
         </p:style>
         <p:txBody>
-          <a:bodyPr wrap="square" lIns="164592" tIns="228600" rIns="164592" rtlCol="0" anchor="ctr"/>
+          <a:bodyPr rtlCol="0" anchor="ctr" wrap="square" lIns="164592" rIns="164592" tIns="228600"/>
           <a:lstStyle/>
           <a:p>
             <a:pPr algn="ctr">
@@ -5721,7 +6754,7 @@
           </a:fontRef>
         </p:style>
         <p:txBody>
-          <a:bodyPr wrap="square" lIns="164592" tIns="228600" rIns="164592" rtlCol="0" anchor="ctr"/>
+          <a:bodyPr rtlCol="0" anchor="ctr" wrap="square" lIns="164592" rIns="164592" tIns="228600"/>
           <a:lstStyle/>
           <a:p>
             <a:pPr algn="ctr">
@@ -5805,7 +6838,7 @@
           </a:fontRef>
         </p:style>
         <p:txBody>
-          <a:bodyPr wrap="square" lIns="164592" tIns="228600" rIns="164592" rtlCol="0" anchor="ctr"/>
+          <a:bodyPr rtlCol="0" anchor="ctr" wrap="square" lIns="164592" rIns="164592" tIns="228600"/>
           <a:lstStyle/>
           <a:p>
             <a:pPr algn="ctr">
@@ -5889,7 +6922,7 @@
           </a:fontRef>
         </p:style>
         <p:txBody>
-          <a:bodyPr wrap="square" lIns="164592" tIns="228600" rIns="164592" rtlCol="0" anchor="ctr"/>
+          <a:bodyPr rtlCol="0" anchor="ctr" wrap="square" lIns="164592" rIns="164592" tIns="228600"/>
           <a:lstStyle/>
           <a:p>
             <a:pPr algn="ctr">
@@ -5944,7 +6977,7 @@
 </file>
 
 <file path=ppt/slides/slide7.xml><?xml version="1.0" encoding="utf-8"?>
-<p:sld xmlns:a="http://schemas.openxmlformats.org/drawingml/2006/main" xmlns:r="http://schemas.openxmlformats.org/officeDocument/2006/relationships" xmlns:p="http://schemas.openxmlformats.org/presentationml/2006/main">
+<p:sld xmlns:a="http://schemas.openxmlformats.org/drawingml/2006/main" xmlns:p="http://schemas.openxmlformats.org/presentationml/2006/main" xmlns:r="http://schemas.openxmlformats.org/officeDocument/2006/relationships">
   <p:cSld>
     <p:spTree>
       <p:nvGrpSpPr>
@@ -5952,14 +6985,7 @@
         <p:cNvGrpSpPr/>
         <p:nvPr/>
       </p:nvGrpSpPr>
-      <p:grpSpPr>
-        <a:xfrm>
-          <a:off x="0" y="0"/>
-          <a:ext cx="0" cy="0"/>
-          <a:chOff x="0" y="0"/>
-          <a:chExt cx="0" cy="0"/>
-        </a:xfrm>
-      </p:grpSpPr>
+      <p:grpSpPr/>
       <p:sp>
         <p:nvSpPr>
           <p:cNvPr id="2" name="TextBox 1"/>
@@ -6050,7 +7076,6 @@
           <a:lstStyle/>
           <a:p>
             <a:pPr algn="ctr"/>
-            <a:endParaRPr/>
           </a:p>
         </p:txBody>
       </p:sp>
@@ -6092,7 +7117,7 @@
           </a:fontRef>
         </p:style>
         <p:txBody>
-          <a:bodyPr wrap="square" lIns="228600" tIns="228600" rIns="228600" rtlCol="0" anchor="ctr"/>
+          <a:bodyPr rtlCol="0" anchor="ctr" wrap="square" lIns="228600" rIns="228600" tIns="228600"/>
           <a:lstStyle/>
           <a:p>
             <a:pPr algn="ctr">
@@ -6221,7 +7246,7 @@
           </a:fontRef>
         </p:style>
         <p:txBody>
-          <a:bodyPr wrap="square" lIns="228600" tIns="228600" rIns="228600" rtlCol="0" anchor="ctr"/>
+          <a:bodyPr rtlCol="0" anchor="ctr" wrap="square" lIns="228600" rIns="228600" tIns="228600"/>
           <a:lstStyle/>
           <a:p>
             <a:pPr algn="ctr">
@@ -6350,7 +7375,7 @@
           </a:fontRef>
         </p:style>
         <p:txBody>
-          <a:bodyPr wrap="square" lIns="228600" tIns="228600" rIns="228600" rtlCol="0" anchor="ctr"/>
+          <a:bodyPr rtlCol="0" anchor="ctr" wrap="square" lIns="228600" rIns="228600" tIns="228600"/>
           <a:lstStyle/>
           <a:p>
             <a:pPr algn="ctr">
@@ -6361,7 +7386,7 @@
               </a:defRPr>
             </a:pPr>
             <a:r>
-              <a:t>📂 Master Network Hierarchy Ingestion</a:t>
+              <a:t>📂 Hierarchy Ingestion &amp; Cloud Backup Monitor</a:t>
             </a:r>
           </a:p>
           <a:p>
@@ -6376,7 +7401,7 @@
               </a:defRPr>
             </a:pPr>
             <a:r>
-              <a:t>Bulk upload capability for network engineering master sheets across sub-divisions.</a:t>
+              <a:t>Bulk upload for network master sheets and live Google Drive backup health verification.</a:t>
             </a:r>
           </a:p>
           <a:p>
@@ -6421,7 +7446,7 @@
               </a:defRPr>
             </a:pPr>
             <a:r>
-              <a:t>✓ Populates Region, Center, RT Room, and Node Name data</a:t>
+              <a:t>✓ Live Google Drive sync status pill (🟢 OK) in header bar</a:t>
             </a:r>
           </a:p>
           <a:p>
@@ -6436,7 +7461,7 @@
               </a:defRPr>
             </a:pPr>
             <a:r>
-              <a:t>✓ Propagates automatically to all field mobile devices</a:t>
+              <a:t>✓ 1-Click diagnostic modal for supervisors &amp; engineering heads</a:t>
             </a:r>
           </a:p>
         </p:txBody>
@@ -6450,7 +7475,7 @@
 </file>
 
 <file path=ppt/slides/slide8.xml><?xml version="1.0" encoding="utf-8"?>
-<p:sld xmlns:a="http://schemas.openxmlformats.org/drawingml/2006/main" xmlns:r="http://schemas.openxmlformats.org/officeDocument/2006/relationships" xmlns:p="http://schemas.openxmlformats.org/presentationml/2006/main">
+<p:sld xmlns:a="http://schemas.openxmlformats.org/drawingml/2006/main" xmlns:p="http://schemas.openxmlformats.org/presentationml/2006/main" xmlns:r="http://schemas.openxmlformats.org/officeDocument/2006/relationships">
   <p:cSld>
     <p:spTree>
       <p:nvGrpSpPr>
@@ -6458,14 +7483,7 @@
         <p:cNvGrpSpPr/>
         <p:nvPr/>
       </p:nvGrpSpPr>
-      <p:grpSpPr>
-        <a:xfrm>
-          <a:off x="0" y="0"/>
-          <a:ext cx="0" cy="0"/>
-          <a:chOff x="0" y="0"/>
-          <a:chExt cx="0" cy="0"/>
-        </a:xfrm>
-      </p:grpSpPr>
+      <p:grpSpPr/>
       <p:sp>
         <p:nvSpPr>
           <p:cNvPr id="2" name="TextBox 1"/>
@@ -6556,7 +7574,6 @@
           <a:lstStyle/>
           <a:p>
             <a:pPr algn="ctr"/>
-            <a:endParaRPr/>
           </a:p>
         </p:txBody>
       </p:sp>
@@ -6598,7 +7615,7 @@
           </a:fontRef>
         </p:style>
         <p:txBody>
-          <a:bodyPr wrap="square" lIns="228600" tIns="228600" rIns="228600" rtlCol="0" anchor="ctr"/>
+          <a:bodyPr rtlCol="0" anchor="ctr" wrap="square" lIns="228600" rIns="228600" tIns="228600"/>
           <a:lstStyle/>
           <a:p>
             <a:pPr algn="ctr">
@@ -6727,7 +7744,7 @@
           </a:fontRef>
         </p:style>
         <p:txBody>
-          <a:bodyPr wrap="square" lIns="228600" tIns="228600" rIns="228600" rtlCol="0" anchor="ctr"/>
+          <a:bodyPr rtlCol="0" anchor="ctr" wrap="square" lIns="228600" rIns="228600" tIns="228600"/>
           <a:lstStyle/>
           <a:p>
             <a:pPr algn="ctr">
@@ -6753,7 +7770,7 @@
               </a:defRPr>
             </a:pPr>
             <a:r>
-              <a:t>Cloud Backup &amp; Archival</a:t>
+              <a:t>Decoupled Cloud Archival</a:t>
             </a:r>
           </a:p>
           <a:p>
@@ -6783,7 +7800,7 @@
               </a:defRPr>
             </a:pPr>
             <a:r>
-              <a:t>• Automated Google Drive periodic synchronization scripts for off-site backup.</a:t>
+              <a:t>• Automated isolated cron background worker (backup_to_gdrive.sh) creates encrypted archives.</a:t>
             </a:r>
           </a:p>
           <a:p>
@@ -6798,7 +7815,7 @@
               </a:defRPr>
             </a:pPr>
             <a:r>
-              <a:t>• Standalone snapshot dumps enable rapid full-system recovery within minutes.</a:t>
+              <a:t>• Standalone health verifier (verify_backup_health.py) checks size, age (&lt;24h), and Google Drive.</a:t>
             </a:r>
           </a:p>
           <a:p>
@@ -6813,7 +7830,7 @@
               </a:defRPr>
             </a:pPr>
             <a:r>
-              <a:t>• Local transaction ledgers maintain a permanent, verifiable audit history.</a:t>
+              <a:t>• Decoupled sidecar file architecture ensures ZERO server event loop stalling or performance drop.</a:t>
             </a:r>
           </a:p>
         </p:txBody>
@@ -6856,7 +7873,7 @@
           </a:fontRef>
         </p:style>
         <p:txBody>
-          <a:bodyPr wrap="square" lIns="228600" tIns="228600" rIns="228600" rtlCol="0" anchor="ctr"/>
+          <a:bodyPr rtlCol="0" anchor="ctr" wrap="square" lIns="228600" rIns="228600" tIns="228600"/>
           <a:lstStyle/>
           <a:p>
             <a:pPr algn="ctr">
@@ -6956,7 +7973,7 @@
 </file>
 
 <file path=ppt/slides/slide9.xml><?xml version="1.0" encoding="utf-8"?>
-<p:sld xmlns:a="http://schemas.openxmlformats.org/drawingml/2006/main" xmlns:r="http://schemas.openxmlformats.org/officeDocument/2006/relationships" xmlns:p="http://schemas.openxmlformats.org/presentationml/2006/main">
+<p:sld xmlns:a="http://schemas.openxmlformats.org/drawingml/2006/main" xmlns:p="http://schemas.openxmlformats.org/presentationml/2006/main" xmlns:r="http://schemas.openxmlformats.org/officeDocument/2006/relationships">
   <p:cSld>
     <p:spTree>
       <p:nvGrpSpPr>
@@ -6964,14 +7981,7 @@
         <p:cNvGrpSpPr/>
         <p:nvPr/>
       </p:nvGrpSpPr>
-      <p:grpSpPr>
-        <a:xfrm>
-          <a:off x="0" y="0"/>
-          <a:ext cx="0" cy="0"/>
-          <a:chOff x="0" y="0"/>
-          <a:chExt cx="0" cy="0"/>
-        </a:xfrm>
-      </p:grpSpPr>
+      <p:grpSpPr/>
       <p:sp>
         <p:nvSpPr>
           <p:cNvPr id="2" name="TextBox 1"/>
@@ -7002,7 +8012,7 @@
               </a:defRPr>
             </a:pPr>
             <a:r>
-              <a:t>EXECUTIVE RECOMMENDATIONS</a:t>
+              <a:t>DISASTER RECOVERY ARCHITECTURE</a:t>
             </a:r>
           </a:p>
           <a:p>
@@ -7017,7 +8027,7 @@
               </a:defRPr>
             </a:pPr>
             <a:r>
-              <a:t>Strategic Roadmap &amp; Future Capabilities</a:t>
+              <a:t>Decoupled Google Drive Backup &amp; Live Health Monitor</a:t>
             </a:r>
           </a:p>
         </p:txBody>
@@ -7062,7 +8072,6 @@
           <a:lstStyle/>
           <a:p>
             <a:pPr algn="ctr"/>
-            <a:endParaRPr/>
           </a:p>
         </p:txBody>
       </p:sp>
@@ -7074,8 +8083,221 @@
         </p:nvSpPr>
         <p:spPr>
           <a:xfrm>
-            <a:off x="731520" y="1645920"/>
-            <a:ext cx="3413455" cy="3931920"/>
+            <a:off x="731520" y="1554480"/>
+            <a:ext cx="10728655" cy="868680"/>
+          </a:xfrm>
+          <a:prstGeom prst="roundRect">
+            <a:avLst/>
+          </a:prstGeom>
+          <a:solidFill>
+            <a:srgbClr val="F8FAFC"/>
+          </a:solidFill>
+          <a:ln>
+            <a:solidFill>
+              <a:srgbClr val="BAE6FD"/>
+            </a:solidFill>
+          </a:ln>
+        </p:spPr>
+        <p:style>
+          <a:lnRef idx="1">
+            <a:schemeClr val="accent1"/>
+          </a:lnRef>
+          <a:fillRef idx="3">
+            <a:schemeClr val="accent1"/>
+          </a:fillRef>
+          <a:effectRef idx="2">
+            <a:schemeClr val="accent1"/>
+          </a:effectRef>
+          <a:fontRef idx="minor">
+            <a:schemeClr val="lt1"/>
+          </a:fontRef>
+        </p:style>
+        <p:txBody>
+          <a:bodyPr rtlCol="0" anchor="ctr" wrap="square" lIns="228600" rIns="228600" tIns="109728"/>
+          <a:lstStyle/>
+          <a:p>
+            <a:pPr algn="ctr">
+              <a:defRPr sz="1050" b="1">
+                <a:solidFill>
+                  <a:srgbClr val="0284C7"/>
+                </a:solidFill>
+              </a:defRPr>
+            </a:pPr>
+            <a:r>
+              <a:t>CORE ARCHITECTURAL PRINCIPLE: ZERO WEB SERVER OVERLOAD</a:t>
+            </a:r>
+          </a:p>
+          <a:p>
+            <a:pPr>
+              <a:spcBef>
+                <a:spcPts val="300"/>
+              </a:spcBef>
+              <a:defRPr sz="1000">
+                <a:solidFill>
+                  <a:srgbClr val="1E293B"/>
+                </a:solidFill>
+              </a:defRPr>
+            </a:pPr>
+            <a:r>
+              <a:t>Absolute decoupling between background cloud synchronization (rclone + cron) and FastAPI's web server event loop. Background sync operates independently, while the Central Office web server performs microscopic (&lt;0.2ms) local JSON reads, guaranteeing zero button freezes or UI latency.</a:t>
+            </a:r>
+          </a:p>
+        </p:txBody>
+      </p:sp>
+      <p:sp>
+        <p:nvSpPr>
+          <p:cNvPr id="5" name="Rounded Rectangle 4"/>
+          <p:cNvSpPr/>
+          <p:nvPr/>
+        </p:nvSpPr>
+        <p:spPr>
+          <a:xfrm>
+            <a:off x="731520" y="2560320"/>
+            <a:ext cx="3413455" cy="3337560"/>
+          </a:xfrm>
+          <a:prstGeom prst="roundRect">
+            <a:avLst/>
+          </a:prstGeom>
+          <a:solidFill>
+            <a:srgbClr val="F8FAFC"/>
+          </a:solidFill>
+          <a:ln>
+            <a:solidFill>
+              <a:srgbClr val="0284C7"/>
+            </a:solidFill>
+          </a:ln>
+        </p:spPr>
+        <p:style>
+          <a:lnRef idx="1">
+            <a:schemeClr val="accent1"/>
+          </a:lnRef>
+          <a:fillRef idx="3">
+            <a:schemeClr val="accent1"/>
+          </a:fillRef>
+          <a:effectRef idx="2">
+            <a:schemeClr val="accent1"/>
+          </a:effectRef>
+          <a:fontRef idx="minor">
+            <a:schemeClr val="lt1"/>
+          </a:fontRef>
+        </p:style>
+        <p:txBody>
+          <a:bodyPr rtlCol="0" anchor="ctr" wrap="square" lIns="228600" rIns="228600" tIns="182880"/>
+          <a:lstStyle/>
+          <a:p>
+            <a:pPr algn="ctr">
+              <a:defRPr sz="950" b="1">
+                <a:solidFill>
+                  <a:srgbClr val="0284C7"/>
+                </a:solidFill>
+              </a:defRPr>
+            </a:pPr>
+            <a:r>
+              <a:t>TIER 1: ISOLATED WORKER</a:t>
+            </a:r>
+          </a:p>
+          <a:p>
+            <a:pPr>
+              <a:spcBef>
+                <a:spcPts val="300"/>
+              </a:spcBef>
+              <a:defRPr sz="1450" b="1">
+                <a:solidFill>
+                  <a:srgbClr val="0F172A"/>
+                </a:solidFill>
+              </a:defRPr>
+            </a:pPr>
+            <a:r>
+              <a:t>Background Cron Sync</a:t>
+            </a:r>
+          </a:p>
+          <a:p>
+            <a:pPr>
+              <a:spcBef>
+                <a:spcPts val="200"/>
+              </a:spcBef>
+              <a:defRPr sz="800">
+                <a:solidFill>
+                  <a:srgbClr val="E2E8F0"/>
+                </a:solidFill>
+              </a:defRPr>
+            </a:pPr>
+            <a:r>
+              <a:t>─────────────────────</a:t>
+            </a:r>
+          </a:p>
+          <a:p>
+            <a:pPr>
+              <a:spcBef>
+                <a:spcPts val="500"/>
+              </a:spcBef>
+              <a:defRPr sz="1000">
+                <a:solidFill>
+                  <a:srgbClr val="1E293B"/>
+                </a:solidFill>
+              </a:defRPr>
+            </a:pPr>
+            <a:r>
+              <a:t>• Runs on Linux system cron 24/7 without touching server.py.</a:t>
+            </a:r>
+          </a:p>
+          <a:p>
+            <a:pPr>
+              <a:spcBef>
+                <a:spcPts val="500"/>
+              </a:spcBef>
+              <a:defRPr sz="1000">
+                <a:solidFill>
+                  <a:srgbClr val="1E293B"/>
+                </a:solidFill>
+              </a:defRPr>
+            </a:pPr>
+            <a:r>
+              <a:t>• Compresses SQLite DB &amp; Node Master into timestamped tar.gz archives.</a:t>
+            </a:r>
+          </a:p>
+          <a:p>
+            <a:pPr>
+              <a:spcBef>
+                <a:spcPts val="500"/>
+              </a:spcBef>
+              <a:defRPr sz="1000">
+                <a:solidFill>
+                  <a:srgbClr val="1E293B"/>
+                </a:solidFill>
+              </a:defRPr>
+            </a:pPr>
+            <a:r>
+              <a:t>• Safely synchronizes archives to Google Drive (gdrive:GPON_Backups) via rclone.</a:t>
+            </a:r>
+          </a:p>
+          <a:p>
+            <a:pPr>
+              <a:spcBef>
+                <a:spcPts val="500"/>
+              </a:spcBef>
+              <a:defRPr sz="1000">
+                <a:solidFill>
+                  <a:srgbClr val="1E293B"/>
+                </a:solidFill>
+              </a:defRPr>
+            </a:pPr>
+            <a:r>
+              <a:t>• Automated 30-day rolling retention &amp; transaction audit logging.</a:t>
+            </a:r>
+          </a:p>
+        </p:txBody>
+      </p:sp>
+      <p:sp>
+        <p:nvSpPr>
+          <p:cNvPr id="6" name="Rounded Rectangle 5"/>
+          <p:cNvSpPr/>
+          <p:nvPr/>
+        </p:nvSpPr>
+        <p:spPr>
+          <a:xfrm>
+            <a:off x="4389120" y="2560320"/>
+            <a:ext cx="3413455" cy="3337560"/>
           </a:xfrm>
           <a:prstGeom prst="roundRect">
             <a:avLst/>
@@ -7104,19 +8326,18 @@
           </a:fontRef>
         </p:style>
         <p:txBody>
-          <a:bodyPr wrap="square" lIns="228600" tIns="228600" rIns="228600" rtlCol="0" anchor="ctr"/>
+          <a:bodyPr rtlCol="0" anchor="ctr" wrap="square" lIns="228600" rIns="228600" tIns="182880"/>
           <a:lstStyle/>
           <a:p>
             <a:pPr algn="ctr">
-              <a:defRPr sz="1000" b="1">
+              <a:defRPr sz="950" b="1">
                 <a:solidFill>
                   <a:srgbClr val="10B981"/>
                 </a:solidFill>
               </a:defRPr>
             </a:pPr>
             <a:r>
-              <a:rPr dirty="0"/>
-              <a:t>PHASE 1 (CURRENT ACHIEVED)</a:t>
+              <a:t>TIER 2: VERIFICATION ENGINE</a:t>
             </a:r>
           </a:p>
           <a:p>
@@ -7124,21 +8345,20 @@
               <a:spcBef>
                 <a:spcPts val="300"/>
               </a:spcBef>
-              <a:defRPr sz="1500" b="1">
+              <a:defRPr sz="1450" b="1">
                 <a:solidFill>
                   <a:srgbClr val="0F172A"/>
                 </a:solidFill>
               </a:defRPr>
             </a:pPr>
             <a:r>
-              <a:rPr dirty="0"/>
-              <a:t>GIS Pole &amp; Node Digitalization</a:t>
-            </a:r>
-          </a:p>
-          <a:p>
-            <a:pPr>
-              <a:spcBef>
-                <a:spcPts val="400"/>
+              <a:t>Standalone Health Verifier</a:t>
+            </a:r>
+          </a:p>
+          <a:p>
+            <a:pPr>
+              <a:spcBef>
+                <a:spcPts val="200"/>
               </a:spcBef>
               <a:defRPr sz="800">
                 <a:solidFill>
@@ -7147,199 +8367,81 @@
               </a:defRPr>
             </a:pPr>
             <a:r>
-              <a:rPr dirty="0"/>
               <a:t>─────────────────────</a:t>
             </a:r>
           </a:p>
           <a:p>
             <a:pPr>
               <a:spcBef>
-                <a:spcPts val="600"/>
-              </a:spcBef>
-              <a:defRPr sz="1100">
+                <a:spcPts val="500"/>
+              </a:spcBef>
+              <a:defRPr sz="1000">
                 <a:solidFill>
                   <a:srgbClr val="1E293B"/>
                 </a:solidFill>
               </a:defRPr>
             </a:pPr>
             <a:r>
-              <a:rPr dirty="0"/>
-              <a:t>• Full transition to mobile PWA field survey.</a:t>
-            </a:r>
-          </a:p>
-          <a:p>
-            <a:pPr>
-              <a:spcBef>
-                <a:spcPts val="600"/>
-              </a:spcBef>
-              <a:defRPr sz="1100">
+              <a:t>• Dedicated diagnostic tool (scripts/verify_backup_health.py).</a:t>
+            </a:r>
+          </a:p>
+          <a:p>
+            <a:pPr>
+              <a:spcBef>
+                <a:spcPts val="500"/>
+              </a:spcBef>
+              <a:defRPr sz="1000">
                 <a:solidFill>
                   <a:srgbClr val="1E293B"/>
                 </a:solidFill>
               </a:defRPr>
             </a:pPr>
             <a:r>
-              <a:rPr dirty="0"/>
-              <a:t>• Cascading validation for Region, Center &amp; RT Room.</a:t>
-            </a:r>
-          </a:p>
-          <a:p>
-            <a:pPr>
-              <a:spcBef>
-                <a:spcPts val="600"/>
-              </a:spcBef>
-              <a:defRPr sz="1100">
+              <a:t>• Validates archive presence, file size integrity, age freshness (&lt;24h), and rclone remote status.</a:t>
+            </a:r>
+          </a:p>
+          <a:p>
+            <a:pPr>
+              <a:spcBef>
+                <a:spcPts val="500"/>
+              </a:spcBef>
+              <a:defRPr sz="1000">
                 <a:solidFill>
                   <a:srgbClr val="1E293B"/>
                 </a:solidFill>
               </a:defRPr>
             </a:pPr>
             <a:r>
-              <a:rPr dirty="0"/>
-              <a:t>• Robust offline caching and multi-center user governance.</a:t>
-            </a:r>
-          </a:p>
-        </p:txBody>
-      </p:sp>
-      <p:sp>
-        <p:nvSpPr>
-          <p:cNvPr id="5" name="Rounded Rectangle 4"/>
+              <a:t>• Outputs microscopic sidecar status file (backup_status.json, ~300 B).</a:t>
+            </a:r>
+          </a:p>
+          <a:p>
+            <a:pPr>
+              <a:spcBef>
+                <a:spcPts val="500"/>
+              </a:spcBef>
+              <a:defRPr sz="1000">
+                <a:solidFill>
+                  <a:srgbClr val="1E293B"/>
+                </a:solidFill>
+              </a:defRPr>
+            </a:pPr>
+            <a:r>
+              <a:t>• CLI interactive test mode (--test) for real-time terminal inspections.</a:t>
+            </a:r>
+          </a:p>
+        </p:txBody>
+      </p:sp>
+      <p:sp>
+        <p:nvSpPr>
+          <p:cNvPr id="7" name="Rounded Rectangle 6"/>
           <p:cNvSpPr/>
           <p:nvPr/>
         </p:nvSpPr>
         <p:spPr>
           <a:xfrm>
-            <a:off x="4389120" y="1645920"/>
-            <a:ext cx="3413455" cy="3931920"/>
-          </a:xfrm>
-          <a:prstGeom prst="roundRect">
-            <a:avLst/>
-          </a:prstGeom>
-          <a:solidFill>
-            <a:srgbClr val="F8FAFC"/>
-          </a:solidFill>
-          <a:ln>
-            <a:solidFill>
-              <a:srgbClr val="0284C7"/>
-            </a:solidFill>
-          </a:ln>
-        </p:spPr>
-        <p:style>
-          <a:lnRef idx="1">
-            <a:schemeClr val="accent1"/>
-          </a:lnRef>
-          <a:fillRef idx="3">
-            <a:schemeClr val="accent1"/>
-          </a:fillRef>
-          <a:effectRef idx="2">
-            <a:schemeClr val="accent1"/>
-          </a:effectRef>
-          <a:fontRef idx="minor">
-            <a:schemeClr val="lt1"/>
-          </a:fontRef>
-        </p:style>
-        <p:txBody>
-          <a:bodyPr wrap="square" lIns="228600" tIns="228600" rIns="228600" rtlCol="0" anchor="ctr"/>
-          <a:lstStyle/>
-          <a:p>
-            <a:pPr algn="ctr">
-              <a:defRPr sz="1000" b="1">
-                <a:solidFill>
-                  <a:srgbClr val="0284C7"/>
-                </a:solidFill>
-              </a:defRPr>
-            </a:pPr>
-            <a:r>
-              <a:t>PHASE 2 (RECOMMENDED Q1)</a:t>
-            </a:r>
-          </a:p>
-          <a:p>
-            <a:pPr>
-              <a:spcBef>
-                <a:spcPts val="300"/>
-              </a:spcBef>
-              <a:defRPr sz="1500" b="1">
-                <a:solidFill>
-                  <a:srgbClr val="0F172A"/>
-                </a:solidFill>
-              </a:defRPr>
-            </a:pPr>
-            <a:r>
-              <a:t>Automated Optical Route Tracing</a:t>
-            </a:r>
-          </a:p>
-          <a:p>
-            <a:pPr>
-              <a:spcBef>
-                <a:spcPts val="400"/>
-              </a:spcBef>
-              <a:defRPr sz="800">
-                <a:solidFill>
-                  <a:srgbClr val="E2E8F0"/>
-                </a:solidFill>
-              </a:defRPr>
-            </a:pPr>
-            <a:r>
-              <a:t>─────────────────────</a:t>
-            </a:r>
-          </a:p>
-          <a:p>
-            <a:pPr>
-              <a:spcBef>
-                <a:spcPts val="600"/>
-              </a:spcBef>
-              <a:defRPr sz="1100">
-                <a:solidFill>
-                  <a:srgbClr val="1E293B"/>
-                </a:solidFill>
-              </a:defRPr>
-            </a:pPr>
-            <a:r>
-              <a:t>• Vector line rendering connecting physical KSEB poles.</a:t>
-            </a:r>
-          </a:p>
-          <a:p>
-            <a:pPr>
-              <a:spcBef>
-                <a:spcPts val="600"/>
-              </a:spcBef>
-              <a:defRPr sz="1100">
-                <a:solidFill>
-                  <a:srgbClr val="1E293B"/>
-                </a:solidFill>
-              </a:defRPr>
-            </a:pPr>
-            <a:r>
-              <a:t>• Automated end-to-end fiber span distance calculations.</a:t>
-            </a:r>
-          </a:p>
-          <a:p>
-            <a:pPr>
-              <a:spcBef>
-                <a:spcPts val="600"/>
-              </a:spcBef>
-              <a:defRPr sz="1100">
-                <a:solidFill>
-                  <a:srgbClr val="1E293B"/>
-                </a:solidFill>
-              </a:defRPr>
-            </a:pPr>
-            <a:r>
-              <a:t>• Interactive spatial GIS map overlay for central planners.</a:t>
-            </a:r>
-          </a:p>
-        </p:txBody>
-      </p:sp>
-      <p:sp>
-        <p:nvSpPr>
-          <p:cNvPr id="6" name="Rounded Rectangle 5"/>
-          <p:cNvSpPr/>
-          <p:nvPr/>
-        </p:nvSpPr>
-        <p:spPr>
-          <a:xfrm>
-            <a:off x="8046720" y="1645920"/>
-            <a:ext cx="3413455" cy="3931920"/>
+            <a:off x="8046720" y="2560320"/>
+            <a:ext cx="3413455" cy="3337560"/>
           </a:xfrm>
           <a:prstGeom prst="roundRect">
             <a:avLst/>
@@ -7368,19 +8470,18 @@
           </a:fontRef>
         </p:style>
         <p:txBody>
-          <a:bodyPr wrap="square" lIns="228600" tIns="228600" rIns="228600" rtlCol="0" anchor="ctr"/>
+          <a:bodyPr rtlCol="0" anchor="ctr" wrap="square" lIns="228600" rIns="228600" tIns="182880"/>
           <a:lstStyle/>
           <a:p>
             <a:pPr algn="ctr">
-              <a:defRPr sz="1000" b="1">
+              <a:defRPr sz="950" b="1">
                 <a:solidFill>
                   <a:srgbClr val="1E293B"/>
                 </a:solidFill>
               </a:defRPr>
             </a:pPr>
             <a:r>
-              <a:rPr dirty="0"/>
-              <a:t>PHASE 3 (STRATEGIC Q2-Q3)</a:t>
+              <a:t>TIER 3: TELEMETRY &amp; UI</a:t>
             </a:r>
           </a:p>
           <a:p>
@@ -7388,21 +8489,20 @@
               <a:spcBef>
                 <a:spcPts val="300"/>
               </a:spcBef>
-              <a:defRPr sz="1500" b="1">
+              <a:defRPr sz="1450" b="1">
                 <a:solidFill>
                   <a:srgbClr val="0F172A"/>
                 </a:solidFill>
               </a:defRPr>
             </a:pPr>
             <a:r>
-              <a:rPr dirty="0"/>
-              <a:t>Optical Power &amp; OSS/BSS Integration</a:t>
-            </a:r>
-          </a:p>
-          <a:p>
-            <a:pPr>
-              <a:spcBef>
-                <a:spcPts val="400"/>
+              <a:t>Live Admin Status Pill</a:t>
+            </a:r>
+          </a:p>
+          <a:p>
+            <a:pPr>
+              <a:spcBef>
+                <a:spcPts val="200"/>
               </a:spcBef>
               <a:defRPr sz="800">
                 <a:solidFill>
@@ -7411,75 +8511,121 @@
               </a:defRPr>
             </a:pPr>
             <a:r>
-              <a:rPr dirty="0"/>
               <a:t>─────────────────────</a:t>
             </a:r>
           </a:p>
           <a:p>
             <a:pPr>
               <a:spcBef>
-                <a:spcPts val="600"/>
-              </a:spcBef>
-              <a:defRPr sz="1100">
+                <a:spcPts val="500"/>
+              </a:spcBef>
+              <a:defRPr sz="1000">
                 <a:solidFill>
                   <a:srgbClr val="1E293B"/>
                 </a:solidFill>
               </a:defRPr>
             </a:pPr>
             <a:r>
-              <a:rPr dirty="0"/>
-              <a:t>• Optical Power Budget (dBm) loss heatmap tracking.</a:t>
-            </a:r>
-          </a:p>
-          <a:p>
-            <a:pPr>
-              <a:spcBef>
-                <a:spcPts val="600"/>
-              </a:spcBef>
-              <a:defRPr sz="1100">
+              <a:t>• Micro-read endpoint (/api/backup-status) executes in &lt;0.2ms with zero subprocess overhead.</a:t>
+            </a:r>
+          </a:p>
+          <a:p>
+            <a:pPr>
+              <a:spcBef>
+                <a:spcPts val="500"/>
+              </a:spcBef>
+              <a:defRPr sz="1000">
                 <a:solidFill>
                   <a:srgbClr val="1E293B"/>
                 </a:solidFill>
               </a:defRPr>
             </a:pPr>
             <a:r>
-              <a:rPr dirty="0"/>
-              <a:t>• Automated fault location triangulation on physical field maps.</a:t>
-            </a:r>
-          </a:p>
-        </p:txBody>
-      </p:sp>
-      <p:sp>
-        <p:nvSpPr>
-          <p:cNvPr id="7" name="TextBox 6"/>
-          <p:cNvSpPr txBox="1"/>
+              <a:t>• Central Office Admin portal displays live status pill (🟢 GDrive: OK 0.5h ago).</a:t>
+            </a:r>
+          </a:p>
+          <a:p>
+            <a:pPr>
+              <a:spcBef>
+                <a:spcPts val="500"/>
+              </a:spcBef>
+              <a:defRPr sz="1000">
+                <a:solidFill>
+                  <a:srgbClr val="1E293B"/>
+                </a:solidFill>
+              </a:defRPr>
+            </a:pPr>
+            <a:r>
+              <a:t>• 1-Click diagnostic inspection modal provides instant operational transparency to senior officers.</a:t>
+            </a:r>
+          </a:p>
+          <a:p>
+            <a:pPr>
+              <a:spcBef>
+                <a:spcPts val="500"/>
+              </a:spcBef>
+              <a:defRPr sz="1000">
+                <a:solidFill>
+                  <a:srgbClr val="1E293B"/>
+                </a:solidFill>
+              </a:defRPr>
+            </a:pPr>
+            <a:r>
+              <a:t>• Non-blocking client-side AbortSignal guarantees admin buttons never hang or freeze.</a:t>
+            </a:r>
+          </a:p>
+        </p:txBody>
+      </p:sp>
+      <p:sp>
+        <p:nvSpPr>
+          <p:cNvPr id="8" name="Rounded Rectangle 7"/>
+          <p:cNvSpPr/>
           <p:nvPr/>
         </p:nvSpPr>
         <p:spPr>
           <a:xfrm>
-            <a:off x="731520" y="5760720"/>
-            <a:ext cx="10728655" cy="731520"/>
+            <a:off x="731520" y="6035040"/>
+            <a:ext cx="10728655" cy="548640"/>
           </a:xfrm>
-          <a:prstGeom prst="rect">
+          <a:prstGeom prst="roundRect">
             <a:avLst/>
           </a:prstGeom>
-          <a:noFill/>
+          <a:solidFill>
+            <a:srgbClr val="D1FAE5"/>
+          </a:solidFill>
+          <a:ln>
+            <a:solidFill>
+              <a:srgbClr val="10B981"/>
+            </a:solidFill>
+          </a:ln>
         </p:spPr>
-        <p:txBody>
-          <a:bodyPr wrap="square" lIns="0" tIns="0" rIns="0" bIns="0">
-            <a:spAutoFit/>
-          </a:bodyPr>
-          <a:lstStyle/>
-          <a:p>
-            <a:pPr>
-              <a:defRPr sz="1150" b="1">
+        <p:style>
+          <a:lnRef idx="1">
+            <a:schemeClr val="accent1"/>
+          </a:lnRef>
+          <a:fillRef idx="3">
+            <a:schemeClr val="accent1"/>
+          </a:fillRef>
+          <a:effectRef idx="2">
+            <a:schemeClr val="accent1"/>
+          </a:effectRef>
+          <a:fontRef idx="minor">
+            <a:schemeClr val="lt1"/>
+          </a:fontRef>
+        </p:style>
+        <p:txBody>
+          <a:bodyPr rtlCol="0" anchor="ctr" wrap="square" lIns="228600" rIns="228600" tIns="109728"/>
+          <a:lstStyle/>
+          <a:p>
+            <a:pPr algn="ctr">
+              <a:defRPr sz="1050" b="1">
                 <a:solidFill>
                   <a:srgbClr val="0F172A"/>
                 </a:solidFill>
               </a:defRPr>
             </a:pPr>
             <a:r>
-              <a:t>Summary Conclusion: The GPON Network Mapping platform delivers a high-accuracy, cost-effective, and fully resilient GIS foundation. System is fully production-ready for circle-wide expansion.</a:t>
+              <a:t>✅ Production Verification on Server psms@psms: Verified 100% healthy synchronization to Google Drive in 0.5 hours with zero server CPU/RAM load.</a:t>
             </a:r>
           </a:p>
         </p:txBody>
